--- a/Vakken/Video videoverdieping/Opdrachten/Pitch en moodboard/Parallax.pptx
+++ b/Vakken/Video videoverdieping/Opdrachten/Pitch en moodboard/Parallax.pptx
@@ -271,7 +271,7 @@
           <a:p>
             <a:fld id="{A25F1918-5973-4FC9-B50F-499E20EE1327}" type="datetimeFigureOut">
               <a:rPr lang="nl-BE" smtClean="0"/>
-              <a:t>11/02/2025</a:t>
+              <a:t>13/02/2025</a:t>
             </a:fld>
             <a:endParaRPr lang="nl-BE"/>
           </a:p>
@@ -471,7 +471,7 @@
           <a:p>
             <a:fld id="{A25F1918-5973-4FC9-B50F-499E20EE1327}" type="datetimeFigureOut">
               <a:rPr lang="nl-BE" smtClean="0"/>
-              <a:t>11/02/2025</a:t>
+              <a:t>13/02/2025</a:t>
             </a:fld>
             <a:endParaRPr lang="nl-BE"/>
           </a:p>
@@ -681,7 +681,7 @@
           <a:p>
             <a:fld id="{A25F1918-5973-4FC9-B50F-499E20EE1327}" type="datetimeFigureOut">
               <a:rPr lang="nl-BE" smtClean="0"/>
-              <a:t>11/02/2025</a:t>
+              <a:t>13/02/2025</a:t>
             </a:fld>
             <a:endParaRPr lang="nl-BE"/>
           </a:p>
@@ -881,7 +881,7 @@
           <a:p>
             <a:fld id="{A25F1918-5973-4FC9-B50F-499E20EE1327}" type="datetimeFigureOut">
               <a:rPr lang="nl-BE" smtClean="0"/>
-              <a:t>11/02/2025</a:t>
+              <a:t>13/02/2025</a:t>
             </a:fld>
             <a:endParaRPr lang="nl-BE"/>
           </a:p>
@@ -1157,7 +1157,7 @@
           <a:p>
             <a:fld id="{A25F1918-5973-4FC9-B50F-499E20EE1327}" type="datetimeFigureOut">
               <a:rPr lang="nl-BE" smtClean="0"/>
-              <a:t>11/02/2025</a:t>
+              <a:t>13/02/2025</a:t>
             </a:fld>
             <a:endParaRPr lang="nl-BE"/>
           </a:p>
@@ -1425,7 +1425,7 @@
           <a:p>
             <a:fld id="{A25F1918-5973-4FC9-B50F-499E20EE1327}" type="datetimeFigureOut">
               <a:rPr lang="nl-BE" smtClean="0"/>
-              <a:t>11/02/2025</a:t>
+              <a:t>13/02/2025</a:t>
             </a:fld>
             <a:endParaRPr lang="nl-BE"/>
           </a:p>
@@ -1840,7 +1840,7 @@
           <a:p>
             <a:fld id="{A25F1918-5973-4FC9-B50F-499E20EE1327}" type="datetimeFigureOut">
               <a:rPr lang="nl-BE" smtClean="0"/>
-              <a:t>11/02/2025</a:t>
+              <a:t>13/02/2025</a:t>
             </a:fld>
             <a:endParaRPr lang="nl-BE"/>
           </a:p>
@@ -1982,7 +1982,7 @@
           <a:p>
             <a:fld id="{A25F1918-5973-4FC9-B50F-499E20EE1327}" type="datetimeFigureOut">
               <a:rPr lang="nl-BE" smtClean="0"/>
-              <a:t>11/02/2025</a:t>
+              <a:t>13/02/2025</a:t>
             </a:fld>
             <a:endParaRPr lang="nl-BE"/>
           </a:p>
@@ -2095,7 +2095,7 @@
           <a:p>
             <a:fld id="{A25F1918-5973-4FC9-B50F-499E20EE1327}" type="datetimeFigureOut">
               <a:rPr lang="nl-BE" smtClean="0"/>
-              <a:t>11/02/2025</a:t>
+              <a:t>13/02/2025</a:t>
             </a:fld>
             <a:endParaRPr lang="nl-BE"/>
           </a:p>
@@ -2408,7 +2408,7 @@
           <a:p>
             <a:fld id="{A25F1918-5973-4FC9-B50F-499E20EE1327}" type="datetimeFigureOut">
               <a:rPr lang="nl-BE" smtClean="0"/>
-              <a:t>11/02/2025</a:t>
+              <a:t>13/02/2025</a:t>
             </a:fld>
             <a:endParaRPr lang="nl-BE"/>
           </a:p>
@@ -2697,7 +2697,7 @@
           <a:p>
             <a:fld id="{A25F1918-5973-4FC9-B50F-499E20EE1327}" type="datetimeFigureOut">
               <a:rPr lang="nl-BE" smtClean="0"/>
-              <a:t>11/02/2025</a:t>
+              <a:t>13/02/2025</a:t>
             </a:fld>
             <a:endParaRPr lang="nl-BE"/>
           </a:p>
@@ -2940,7 +2940,7 @@
           <a:p>
             <a:fld id="{A25F1918-5973-4FC9-B50F-499E20EE1327}" type="datetimeFigureOut">
               <a:rPr lang="nl-BE" smtClean="0"/>
-              <a:t>11/02/2025</a:t>
+              <a:t>13/02/2025</a:t>
             </a:fld>
             <a:endParaRPr lang="nl-BE"/>
           </a:p>
@@ -3343,6 +3343,17 @@
 <file path=ppt/slides/slide1.xml><?xml version="1.0" encoding="utf-8"?>
 <p:sld xmlns:a="http://schemas.openxmlformats.org/drawingml/2006/main" xmlns:r="http://schemas.openxmlformats.org/officeDocument/2006/relationships" xmlns:p="http://schemas.openxmlformats.org/presentationml/2006/main">
   <p:cSld>
+    <p:bg>
+      <p:bgPr>
+        <a:solidFill>
+          <a:schemeClr val="tx1">
+            <a:lumMod val="95000"/>
+            <a:lumOff val="5000"/>
+          </a:schemeClr>
+        </a:solidFill>
+        <a:effectLst/>
+      </p:bgPr>
+    </p:bg>
     <p:spTree>
       <p:nvGrpSpPr>
         <p:cNvPr id="1" name=""/>
@@ -3373,16 +3384,28 @@
             <p:ph type="ctrTitle"/>
           </p:nvPr>
         </p:nvSpPr>
-        <p:spPr/>
+        <p:spPr>
+          <a:noFill/>
+        </p:spPr>
         <p:txBody>
           <a:bodyPr/>
           <a:lstStyle/>
           <a:p>
             <a:r>
-              <a:rPr lang="en-GB" dirty="0"/>
+              <a:rPr lang="en-GB" b="1" dirty="0">
+                <a:solidFill>
+                  <a:schemeClr val="bg1"/>
+                </a:solidFill>
+                <a:latin typeface="Franklin Gothic Medium" panose="020B0603020102020204" pitchFamily="34" charset="0"/>
+              </a:rPr>
               <a:t>Parallax</a:t>
             </a:r>
-            <a:endParaRPr lang="nl-BE" dirty="0"/>
+            <a:endParaRPr lang="nl-BE" b="1" dirty="0">
+              <a:solidFill>
+                <a:schemeClr val="bg1"/>
+              </a:solidFill>
+              <a:latin typeface="Franklin Gothic Medium" panose="020B0603020102020204" pitchFamily="34" charset="0"/>
+            </a:endParaRPr>
           </a:p>
         </p:txBody>
       </p:sp>
@@ -3408,10 +3431,20 @@
           <a:lstStyle/>
           <a:p>
             <a:r>
-              <a:rPr lang="en-GB" dirty="0"/>
+              <a:rPr lang="en-GB" dirty="0">
+                <a:solidFill>
+                  <a:schemeClr val="bg1"/>
+                </a:solidFill>
+                <a:latin typeface="Franklin Gothic Medium" panose="020B0603020102020204" pitchFamily="34" charset="0"/>
+              </a:rPr>
               <a:t>The cycle of frustration</a:t>
             </a:r>
-            <a:endParaRPr lang="nl-BE" dirty="0"/>
+            <a:endParaRPr lang="nl-BE" dirty="0">
+              <a:solidFill>
+                <a:schemeClr val="bg1"/>
+              </a:solidFill>
+              <a:latin typeface="Franklin Gothic Medium" panose="020B0603020102020204" pitchFamily="34" charset="0"/>
+            </a:endParaRPr>
           </a:p>
         </p:txBody>
       </p:sp>
@@ -3431,6 +3464,14 @@
 <file path=ppt/slides/slide10.xml><?xml version="1.0" encoding="utf-8"?>
 <p:sld xmlns:a="http://schemas.openxmlformats.org/drawingml/2006/main" xmlns:r="http://schemas.openxmlformats.org/officeDocument/2006/relationships" xmlns:p="http://schemas.openxmlformats.org/presentationml/2006/main">
   <p:cSld>
+    <p:bg>
+      <p:bgPr>
+        <a:solidFill>
+          <a:schemeClr val="tx1"/>
+        </a:solidFill>
+        <a:effectLst/>
+      </p:bgPr>
+    </p:bg>
     <p:spTree>
       <p:nvGrpSpPr>
         <p:cNvPr id="1" name="">
@@ -3480,14 +3521,29 @@
           <a:lstStyle/>
           <a:p>
             <a:r>
-              <a:rPr lang="en-GB" b="1" dirty="0"/>
+              <a:rPr lang="en-GB" b="1" dirty="0">
+                <a:solidFill>
+                  <a:schemeClr val="bg1"/>
+                </a:solidFill>
+                <a:latin typeface="Franklin Gothic Medium" panose="020B0603020102020204" pitchFamily="34" charset="0"/>
+              </a:rPr>
               <a:t>Einde</a:t>
             </a:r>
             <a:br>
-              <a:rPr lang="en-GB" b="1" dirty="0"/>
+              <a:rPr lang="en-GB" b="1" dirty="0">
+                <a:solidFill>
+                  <a:schemeClr val="bg1"/>
+                </a:solidFill>
+                <a:latin typeface="Franklin Gothic Medium" panose="020B0603020102020204" pitchFamily="34" charset="0"/>
+              </a:rPr>
             </a:br>
             <a:r>
-              <a:rPr lang="nl-BE" dirty="0"/>
+              <a:rPr lang="nl-BE" dirty="0">
+                <a:solidFill>
+                  <a:schemeClr val="bg1"/>
+                </a:solidFill>
+                <a:latin typeface="Franklin Gothic Medium" panose="020B0603020102020204" pitchFamily="34" charset="0"/>
+              </a:rPr>
               <a:t>Het hoofdpersonage moet uiteindelijk kiezen of dat hij blijft zichzelf afleiden van zijn problemen, blijft staan en een dreigend einde van zichzelf durft te confronteren, of verder in de loop blijft te zitten.</a:t>
             </a:r>
           </a:p>
@@ -3517,7 +3573,7 @@
         </p:spPr>
         <p:txBody>
           <a:bodyPr>
-            <a:normAutofit fontScale="92500" lnSpcReduction="20000"/>
+            <a:normAutofit fontScale="92500" lnSpcReduction="10000"/>
           </a:bodyPr>
           <a:lstStyle/>
           <a:p>
@@ -3525,18 +3581,38 @@
               <a:buNone/>
             </a:pPr>
             <a:r>
-              <a:rPr lang="en-GB" dirty="0" err="1"/>
+              <a:rPr lang="en-GB" dirty="0" err="1">
+                <a:solidFill>
+                  <a:schemeClr val="bg1"/>
+                </a:solidFill>
+                <a:latin typeface="Franklin Gothic Medium" panose="020B0603020102020204" pitchFamily="34" charset="0"/>
+              </a:rPr>
               <a:t>Verloop</a:t>
             </a:r>
             <a:r>
-              <a:rPr lang="en-GB" dirty="0"/>
+              <a:rPr lang="en-GB" dirty="0">
+                <a:solidFill>
+                  <a:schemeClr val="bg1"/>
+                </a:solidFill>
+                <a:latin typeface="Franklin Gothic Medium" panose="020B0603020102020204" pitchFamily="34" charset="0"/>
+              </a:rPr>
               <a:t> van het </a:t>
             </a:r>
             <a:r>
-              <a:rPr lang="en-GB" dirty="0" err="1"/>
+              <a:rPr lang="en-GB" dirty="0" err="1">
+                <a:solidFill>
+                  <a:schemeClr val="bg1"/>
+                </a:solidFill>
+                <a:latin typeface="Franklin Gothic Medium" panose="020B0603020102020204" pitchFamily="34" charset="0"/>
+              </a:rPr>
               <a:t>verhaal</a:t>
             </a:r>
-            <a:endParaRPr lang="nl-BE" dirty="0"/>
+            <a:endParaRPr lang="nl-BE" dirty="0">
+              <a:solidFill>
+                <a:schemeClr val="bg1"/>
+              </a:solidFill>
+              <a:latin typeface="Franklin Gothic Medium" panose="020B0603020102020204" pitchFamily="34" charset="0"/>
+            </a:endParaRPr>
           </a:p>
         </p:txBody>
       </p:sp>
@@ -3608,7 +3684,7 @@
         </p:spPr>
         <p:txBody>
           <a:bodyPr>
-            <a:normAutofit fontScale="92500" lnSpcReduction="20000"/>
+            <a:normAutofit fontScale="92500" lnSpcReduction="10000"/>
           </a:bodyPr>
           <a:lstStyle/>
           <a:p>
@@ -3620,6 +3696,7 @@
                 <a:solidFill>
                   <a:schemeClr val="bg1"/>
                 </a:solidFill>
+                <a:latin typeface="Franklin Gothic Medium" panose="020B0603020102020204" pitchFamily="34" charset="0"/>
               </a:rPr>
               <a:t>Moodboard</a:t>
             </a:r>
@@ -3627,6 +3704,7 @@
               <a:solidFill>
                 <a:schemeClr val="bg1"/>
               </a:solidFill>
+              <a:latin typeface="Franklin Gothic Medium" panose="020B0603020102020204" pitchFamily="34" charset="0"/>
             </a:endParaRPr>
           </a:p>
         </p:txBody>
@@ -3863,6 +3941,14 @@
 <file path=ppt/slides/slide2.xml><?xml version="1.0" encoding="utf-8"?>
 <p:sld xmlns:a="http://schemas.openxmlformats.org/drawingml/2006/main" xmlns:r="http://schemas.openxmlformats.org/officeDocument/2006/relationships" xmlns:p="http://schemas.openxmlformats.org/presentationml/2006/main">
   <p:cSld>
+    <p:bg>
+      <p:bgPr>
+        <a:solidFill>
+          <a:schemeClr val="tx1"/>
+        </a:solidFill>
+        <a:effectLst/>
+      </p:bgPr>
+    </p:bg>
     <p:spTree>
       <p:nvGrpSpPr>
         <p:cNvPr id="1" name=""/>
@@ -3906,142 +3992,317 @@
           <a:lstStyle/>
           <a:p>
             <a:r>
-              <a:rPr lang="en-GB" dirty="0" err="1"/>
+              <a:rPr lang="en-GB" dirty="0" err="1">
+                <a:solidFill>
+                  <a:schemeClr val="bg1"/>
+                </a:solidFill>
+                <a:latin typeface="Franklin Gothic Medium" panose="020B0603020102020204" pitchFamily="34" charset="0"/>
+              </a:rPr>
               <a:t>Een</a:t>
             </a:r>
             <a:r>
-              <a:rPr lang="en-GB" dirty="0"/>
-              <a:t> </a:t>
-            </a:r>
-            <a:r>
-              <a:rPr lang="en-GB" dirty="0" err="1"/>
+              <a:rPr lang="en-GB" dirty="0">
+                <a:solidFill>
+                  <a:schemeClr val="bg1"/>
+                </a:solidFill>
+                <a:latin typeface="Franklin Gothic Medium" panose="020B0603020102020204" pitchFamily="34" charset="0"/>
+              </a:rPr>
+              <a:t> </a:t>
+            </a:r>
+            <a:r>
+              <a:rPr lang="en-GB" dirty="0" err="1">
+                <a:solidFill>
+                  <a:schemeClr val="bg1"/>
+                </a:solidFill>
+                <a:latin typeface="Franklin Gothic Medium" panose="020B0603020102020204" pitchFamily="34" charset="0"/>
+              </a:rPr>
               <a:t>gefrustreerde</a:t>
             </a:r>
             <a:r>
-              <a:rPr lang="en-GB" dirty="0"/>
+              <a:rPr lang="en-GB" dirty="0">
+                <a:solidFill>
+                  <a:schemeClr val="bg1"/>
+                </a:solidFill>
+                <a:latin typeface="Franklin Gothic Medium" panose="020B0603020102020204" pitchFamily="34" charset="0"/>
+              </a:rPr>
               <a:t> student </a:t>
             </a:r>
             <a:r>
-              <a:rPr lang="en-GB" dirty="0" err="1"/>
+              <a:rPr lang="en-GB" dirty="0" err="1">
+                <a:solidFill>
+                  <a:schemeClr val="bg1"/>
+                </a:solidFill>
+                <a:latin typeface="Franklin Gothic Medium" panose="020B0603020102020204" pitchFamily="34" charset="0"/>
+              </a:rPr>
               <a:t>zoekt</a:t>
             </a:r>
             <a:r>
-              <a:rPr lang="en-GB" dirty="0"/>
-              <a:t> </a:t>
-            </a:r>
-            <a:r>
-              <a:rPr lang="en-GB" dirty="0" err="1"/>
+              <a:rPr lang="en-GB" dirty="0">
+                <a:solidFill>
+                  <a:schemeClr val="bg1"/>
+                </a:solidFill>
+                <a:latin typeface="Franklin Gothic Medium" panose="020B0603020102020204" pitchFamily="34" charset="0"/>
+              </a:rPr>
+              <a:t> </a:t>
+            </a:r>
+            <a:r>
+              <a:rPr lang="en-GB" dirty="0" err="1">
+                <a:solidFill>
+                  <a:schemeClr val="bg1"/>
+                </a:solidFill>
+                <a:latin typeface="Franklin Gothic Medium" panose="020B0603020102020204" pitchFamily="34" charset="0"/>
+              </a:rPr>
               <a:t>ontsnapping</a:t>
             </a:r>
             <a:r>
-              <a:rPr lang="en-GB" dirty="0"/>
+              <a:rPr lang="en-GB" dirty="0">
+                <a:solidFill>
+                  <a:schemeClr val="bg1"/>
+                </a:solidFill>
+                <a:latin typeface="Franklin Gothic Medium" panose="020B0603020102020204" pitchFamily="34" charset="0"/>
+              </a:rPr>
               <a:t> en rust in </a:t>
             </a:r>
             <a:r>
-              <a:rPr lang="en-GB" dirty="0" err="1"/>
+              <a:rPr lang="en-GB" dirty="0" err="1">
+                <a:solidFill>
+                  <a:schemeClr val="bg1"/>
+                </a:solidFill>
+                <a:latin typeface="Franklin Gothic Medium" panose="020B0603020102020204" pitchFamily="34" charset="0"/>
+              </a:rPr>
               <a:t>een</a:t>
             </a:r>
             <a:r>
-              <a:rPr lang="en-GB" dirty="0"/>
-              <a:t> </a:t>
-            </a:r>
-            <a:r>
-              <a:rPr lang="en-GB" dirty="0" err="1"/>
+              <a:rPr lang="en-GB" dirty="0">
+                <a:solidFill>
+                  <a:schemeClr val="bg1"/>
+                </a:solidFill>
+                <a:latin typeface="Franklin Gothic Medium" panose="020B0603020102020204" pitchFamily="34" charset="0"/>
+              </a:rPr>
+              <a:t> </a:t>
+            </a:r>
+            <a:r>
+              <a:rPr lang="en-GB" dirty="0" err="1">
+                <a:solidFill>
+                  <a:schemeClr val="bg1"/>
+                </a:solidFill>
+                <a:latin typeface="Franklin Gothic Medium" panose="020B0603020102020204" pitchFamily="34" charset="0"/>
+              </a:rPr>
               <a:t>bos</a:t>
             </a:r>
             <a:r>
-              <a:rPr lang="en-GB" dirty="0"/>
+              <a:rPr lang="en-GB" dirty="0">
+                <a:solidFill>
+                  <a:schemeClr val="bg1"/>
+                </a:solidFill>
+                <a:latin typeface="Franklin Gothic Medium" panose="020B0603020102020204" pitchFamily="34" charset="0"/>
+              </a:rPr>
               <a:t>, maar </a:t>
             </a:r>
             <a:r>
-              <a:rPr lang="en-GB" dirty="0" err="1"/>
+              <a:rPr lang="en-GB" dirty="0" err="1">
+                <a:solidFill>
+                  <a:schemeClr val="bg1"/>
+                </a:solidFill>
+                <a:latin typeface="Franklin Gothic Medium" panose="020B0603020102020204" pitchFamily="34" charset="0"/>
+              </a:rPr>
               <a:t>vindt</a:t>
             </a:r>
             <a:r>
-              <a:rPr lang="en-GB" dirty="0"/>
-              <a:t> </a:t>
-            </a:r>
-            <a:r>
-              <a:rPr lang="en-GB" dirty="0" err="1"/>
+              <a:rPr lang="en-GB" dirty="0">
+                <a:solidFill>
+                  <a:schemeClr val="bg1"/>
+                </a:solidFill>
+                <a:latin typeface="Franklin Gothic Medium" panose="020B0603020102020204" pitchFamily="34" charset="0"/>
+              </a:rPr>
+              <a:t> </a:t>
+            </a:r>
+            <a:r>
+              <a:rPr lang="en-GB" dirty="0" err="1">
+                <a:solidFill>
+                  <a:schemeClr val="bg1"/>
+                </a:solidFill>
+                <a:latin typeface="Franklin Gothic Medium" panose="020B0603020102020204" pitchFamily="34" charset="0"/>
+              </a:rPr>
               <a:t>zichzelf</a:t>
             </a:r>
             <a:r>
-              <a:rPr lang="en-GB" dirty="0"/>
-              <a:t> </a:t>
-            </a:r>
-            <a:r>
-              <a:rPr lang="en-GB" dirty="0" err="1"/>
+              <a:rPr lang="en-GB" dirty="0">
+                <a:solidFill>
+                  <a:schemeClr val="bg1"/>
+                </a:solidFill>
+                <a:latin typeface="Franklin Gothic Medium" panose="020B0603020102020204" pitchFamily="34" charset="0"/>
+              </a:rPr>
+              <a:t> </a:t>
+            </a:r>
+            <a:r>
+              <a:rPr lang="en-GB" dirty="0" err="1">
+                <a:solidFill>
+                  <a:schemeClr val="bg1"/>
+                </a:solidFill>
+                <a:latin typeface="Franklin Gothic Medium" panose="020B0603020102020204" pitchFamily="34" charset="0"/>
+              </a:rPr>
               <a:t>alleen</a:t>
             </a:r>
             <a:r>
-              <a:rPr lang="en-GB" dirty="0"/>
+              <a:rPr lang="en-GB" dirty="0">
+                <a:solidFill>
+                  <a:schemeClr val="bg1"/>
+                </a:solidFill>
+                <a:latin typeface="Franklin Gothic Medium" panose="020B0603020102020204" pitchFamily="34" charset="0"/>
+              </a:rPr>
               <a:t> maar in </a:t>
             </a:r>
             <a:r>
-              <a:rPr lang="en-GB" dirty="0" err="1"/>
+              <a:rPr lang="en-GB" dirty="0" err="1">
+                <a:solidFill>
+                  <a:schemeClr val="bg1"/>
+                </a:solidFill>
+                <a:latin typeface="Franklin Gothic Medium" panose="020B0603020102020204" pitchFamily="34" charset="0"/>
+              </a:rPr>
               <a:t>een</a:t>
             </a:r>
             <a:r>
-              <a:rPr lang="en-GB" dirty="0"/>
+              <a:rPr lang="en-GB" dirty="0">
+                <a:solidFill>
+                  <a:schemeClr val="bg1"/>
+                </a:solidFill>
+                <a:latin typeface="Franklin Gothic Medium" panose="020B0603020102020204" pitchFamily="34" charset="0"/>
+              </a:rPr>
               <a:t> loop van </a:t>
             </a:r>
             <a:r>
-              <a:rPr lang="en-GB" dirty="0" err="1"/>
+              <a:rPr lang="en-GB" dirty="0" err="1">
+                <a:solidFill>
+                  <a:schemeClr val="bg1"/>
+                </a:solidFill>
+                <a:latin typeface="Franklin Gothic Medium" panose="020B0603020102020204" pitchFamily="34" charset="0"/>
+              </a:rPr>
               <a:t>onverklaarbare</a:t>
             </a:r>
             <a:r>
-              <a:rPr lang="en-GB" dirty="0"/>
-              <a:t> </a:t>
-            </a:r>
-            <a:r>
-              <a:rPr lang="en-GB" dirty="0" err="1"/>
+              <a:rPr lang="en-GB" dirty="0">
+                <a:solidFill>
+                  <a:schemeClr val="bg1"/>
+                </a:solidFill>
+                <a:latin typeface="Franklin Gothic Medium" panose="020B0603020102020204" pitchFamily="34" charset="0"/>
+              </a:rPr>
+              <a:t> </a:t>
+            </a:r>
+            <a:r>
+              <a:rPr lang="en-GB" dirty="0" err="1">
+                <a:solidFill>
+                  <a:schemeClr val="bg1"/>
+                </a:solidFill>
+                <a:latin typeface="Franklin Gothic Medium" panose="020B0603020102020204" pitchFamily="34" charset="0"/>
+              </a:rPr>
               <a:t>gebeurtenissen</a:t>
             </a:r>
             <a:r>
-              <a:rPr lang="en-GB" dirty="0"/>
+              <a:rPr lang="en-GB" dirty="0">
+                <a:solidFill>
+                  <a:schemeClr val="bg1"/>
+                </a:solidFill>
+                <a:latin typeface="Franklin Gothic Medium" panose="020B0603020102020204" pitchFamily="34" charset="0"/>
+              </a:rPr>
               <a:t> die hem </a:t>
             </a:r>
             <a:r>
-              <a:rPr lang="en-GB" dirty="0" err="1"/>
+              <a:rPr lang="en-GB" dirty="0" err="1">
+                <a:solidFill>
+                  <a:schemeClr val="bg1"/>
+                </a:solidFill>
+                <a:latin typeface="Franklin Gothic Medium" panose="020B0603020102020204" pitchFamily="34" charset="0"/>
+              </a:rPr>
               <a:t>forceren</a:t>
             </a:r>
             <a:r>
-              <a:rPr lang="en-GB" dirty="0"/>
+              <a:rPr lang="en-GB" dirty="0">
+                <a:solidFill>
+                  <a:schemeClr val="bg1"/>
+                </a:solidFill>
+                <a:latin typeface="Franklin Gothic Medium" panose="020B0603020102020204" pitchFamily="34" charset="0"/>
+              </a:rPr>
               <a:t> om </a:t>
             </a:r>
             <a:r>
-              <a:rPr lang="en-GB" dirty="0" err="1"/>
+              <a:rPr lang="en-GB" dirty="0" err="1">
+                <a:solidFill>
+                  <a:schemeClr val="bg1"/>
+                </a:solidFill>
+                <a:latin typeface="Franklin Gothic Medium" panose="020B0603020102020204" pitchFamily="34" charset="0"/>
+              </a:rPr>
               <a:t>zichzelf</a:t>
             </a:r>
             <a:r>
-              <a:rPr lang="en-GB" dirty="0"/>
-              <a:t> </a:t>
-            </a:r>
-            <a:r>
-              <a:rPr lang="en-GB" dirty="0" err="1"/>
+              <a:rPr lang="en-GB" dirty="0">
+                <a:solidFill>
+                  <a:schemeClr val="bg1"/>
+                </a:solidFill>
+                <a:latin typeface="Franklin Gothic Medium" panose="020B0603020102020204" pitchFamily="34" charset="0"/>
+              </a:rPr>
+              <a:t> </a:t>
+            </a:r>
+            <a:r>
+              <a:rPr lang="en-GB" dirty="0" err="1">
+                <a:solidFill>
+                  <a:schemeClr val="bg1"/>
+                </a:solidFill>
+                <a:latin typeface="Franklin Gothic Medium" panose="020B0603020102020204" pitchFamily="34" charset="0"/>
+              </a:rPr>
               <a:t>te</a:t>
             </a:r>
             <a:r>
-              <a:rPr lang="en-GB" dirty="0"/>
-              <a:t> </a:t>
-            </a:r>
-            <a:r>
-              <a:rPr lang="en-GB" dirty="0" err="1"/>
+              <a:rPr lang="en-GB" dirty="0">
+                <a:solidFill>
+                  <a:schemeClr val="bg1"/>
+                </a:solidFill>
+                <a:latin typeface="Franklin Gothic Medium" panose="020B0603020102020204" pitchFamily="34" charset="0"/>
+              </a:rPr>
+              <a:t> </a:t>
+            </a:r>
+            <a:r>
+              <a:rPr lang="en-GB" dirty="0" err="1">
+                <a:solidFill>
+                  <a:schemeClr val="bg1"/>
+                </a:solidFill>
+                <a:latin typeface="Franklin Gothic Medium" panose="020B0603020102020204" pitchFamily="34" charset="0"/>
+              </a:rPr>
               <a:t>confronteren</a:t>
             </a:r>
             <a:r>
-              <a:rPr lang="en-GB" dirty="0"/>
+              <a:rPr lang="en-GB" dirty="0">
+                <a:solidFill>
+                  <a:schemeClr val="bg1"/>
+                </a:solidFill>
+                <a:latin typeface="Franklin Gothic Medium" panose="020B0603020102020204" pitchFamily="34" charset="0"/>
+              </a:rPr>
               <a:t>, </a:t>
             </a:r>
             <a:r>
-              <a:rPr lang="en-GB" dirty="0" err="1"/>
+              <a:rPr lang="en-GB" dirty="0" err="1">
+                <a:solidFill>
+                  <a:schemeClr val="bg1"/>
+                </a:solidFill>
+                <a:latin typeface="Franklin Gothic Medium" panose="020B0603020102020204" pitchFamily="34" charset="0"/>
+              </a:rPr>
               <a:t>letterlijk</a:t>
             </a:r>
             <a:r>
-              <a:rPr lang="en-GB" dirty="0"/>
+              <a:rPr lang="en-GB" dirty="0">
+                <a:solidFill>
+                  <a:schemeClr val="bg1"/>
+                </a:solidFill>
+                <a:latin typeface="Franklin Gothic Medium" panose="020B0603020102020204" pitchFamily="34" charset="0"/>
+              </a:rPr>
               <a:t>.</a:t>
             </a:r>
-            <a:endParaRPr lang="nl-BE" dirty="0"/>
+            <a:endParaRPr lang="nl-BE" dirty="0">
+              <a:solidFill>
+                <a:schemeClr val="bg1"/>
+              </a:solidFill>
+              <a:latin typeface="Franklin Gothic Medium" panose="020B0603020102020204" pitchFamily="34" charset="0"/>
+            </a:endParaRPr>
           </a:p>
         </p:txBody>
       </p:sp>
@@ -4069,7 +4330,7 @@
         </p:spPr>
         <p:txBody>
           <a:bodyPr>
-            <a:normAutofit fontScale="92500" lnSpcReduction="20000"/>
+            <a:normAutofit fontScale="92500" lnSpcReduction="10000"/>
           </a:bodyPr>
           <a:lstStyle/>
           <a:p>
@@ -4077,10 +4338,20 @@
               <a:buNone/>
             </a:pPr>
             <a:r>
-              <a:rPr lang="en-GB" dirty="0"/>
+              <a:rPr lang="en-GB" dirty="0">
+                <a:solidFill>
+                  <a:schemeClr val="bg1"/>
+                </a:solidFill>
+                <a:latin typeface="Franklin Gothic Medium" panose="020B0603020102020204" pitchFamily="34" charset="0"/>
+              </a:rPr>
               <a:t>Elevator Pitch</a:t>
             </a:r>
-            <a:endParaRPr lang="nl-BE" dirty="0"/>
+            <a:endParaRPr lang="nl-BE" dirty="0">
+              <a:solidFill>
+                <a:schemeClr val="bg1"/>
+              </a:solidFill>
+              <a:latin typeface="Franklin Gothic Medium" panose="020B0603020102020204" pitchFamily="34" charset="0"/>
+            </a:endParaRPr>
           </a:p>
         </p:txBody>
       </p:sp>
@@ -4100,6 +4371,14 @@
 <file path=ppt/slides/slide3.xml><?xml version="1.0" encoding="utf-8"?>
 <p:sld xmlns:a="http://schemas.openxmlformats.org/drawingml/2006/main" xmlns:r="http://schemas.openxmlformats.org/officeDocument/2006/relationships" xmlns:p="http://schemas.openxmlformats.org/presentationml/2006/main">
   <p:cSld>
+    <p:bg>
+      <p:bgPr>
+        <a:solidFill>
+          <a:schemeClr val="tx1"/>
+        </a:solidFill>
+        <a:effectLst/>
+      </p:bgPr>
+    </p:bg>
     <p:spTree>
       <p:nvGrpSpPr>
         <p:cNvPr id="1" name="">
@@ -4149,210 +4428,470 @@
           <a:lstStyle/>
           <a:p>
             <a:r>
-              <a:rPr lang="en-GB" dirty="0"/>
+              <a:rPr lang="en-GB" dirty="0">
+                <a:solidFill>
+                  <a:schemeClr val="bg1"/>
+                </a:solidFill>
+                <a:latin typeface="Franklin Gothic Medium" panose="020B0603020102020204" pitchFamily="34" charset="0"/>
+              </a:rPr>
               <a:t>Recent ben </a:t>
             </a:r>
             <a:r>
-              <a:rPr lang="en-GB" dirty="0" err="1"/>
+              <a:rPr lang="en-GB" dirty="0" err="1">
+                <a:solidFill>
+                  <a:schemeClr val="bg1"/>
+                </a:solidFill>
+                <a:latin typeface="Franklin Gothic Medium" panose="020B0603020102020204" pitchFamily="34" charset="0"/>
+              </a:rPr>
               <a:t>ik</a:t>
             </a:r>
             <a:r>
-              <a:rPr lang="en-GB" dirty="0"/>
-              <a:t> </a:t>
-            </a:r>
-            <a:r>
-              <a:rPr lang="en-GB" dirty="0" err="1"/>
+              <a:rPr lang="en-GB" dirty="0">
+                <a:solidFill>
+                  <a:schemeClr val="bg1"/>
+                </a:solidFill>
+                <a:latin typeface="Franklin Gothic Medium" panose="020B0603020102020204" pitchFamily="34" charset="0"/>
+              </a:rPr>
+              <a:t> </a:t>
+            </a:r>
+            <a:r>
+              <a:rPr lang="en-GB" dirty="0" err="1">
+                <a:solidFill>
+                  <a:schemeClr val="bg1"/>
+                </a:solidFill>
+                <a:latin typeface="Franklin Gothic Medium" panose="020B0603020102020204" pitchFamily="34" charset="0"/>
+              </a:rPr>
               <a:t>gaan</a:t>
             </a:r>
             <a:r>
-              <a:rPr lang="en-GB" dirty="0"/>
-              <a:t> </a:t>
-            </a:r>
-            <a:r>
-              <a:rPr lang="en-GB" dirty="0" err="1"/>
+              <a:rPr lang="en-GB" dirty="0">
+                <a:solidFill>
+                  <a:schemeClr val="bg1"/>
+                </a:solidFill>
+                <a:latin typeface="Franklin Gothic Medium" panose="020B0603020102020204" pitchFamily="34" charset="0"/>
+              </a:rPr>
+              <a:t> </a:t>
+            </a:r>
+            <a:r>
+              <a:rPr lang="en-GB" dirty="0" err="1">
+                <a:solidFill>
+                  <a:schemeClr val="bg1"/>
+                </a:solidFill>
+                <a:latin typeface="Franklin Gothic Medium" panose="020B0603020102020204" pitchFamily="34" charset="0"/>
+              </a:rPr>
               <a:t>fotograferen</a:t>
             </a:r>
             <a:r>
-              <a:rPr lang="en-GB" dirty="0"/>
+              <a:rPr lang="en-GB" dirty="0">
+                <a:solidFill>
+                  <a:schemeClr val="bg1"/>
+                </a:solidFill>
+                <a:latin typeface="Franklin Gothic Medium" panose="020B0603020102020204" pitchFamily="34" charset="0"/>
+              </a:rPr>
               <a:t> in </a:t>
             </a:r>
             <a:r>
-              <a:rPr lang="en-GB" dirty="0" err="1"/>
+              <a:rPr lang="en-GB" dirty="0" err="1">
+                <a:solidFill>
+                  <a:schemeClr val="bg1"/>
+                </a:solidFill>
+                <a:latin typeface="Franklin Gothic Medium" panose="020B0603020102020204" pitchFamily="34" charset="0"/>
+              </a:rPr>
               <a:t>een</a:t>
             </a:r>
             <a:r>
-              <a:rPr lang="en-GB" dirty="0"/>
-              <a:t> </a:t>
-            </a:r>
-            <a:r>
-              <a:rPr lang="en-GB" dirty="0" err="1"/>
+              <a:rPr lang="en-GB" dirty="0">
+                <a:solidFill>
+                  <a:schemeClr val="bg1"/>
+                </a:solidFill>
+                <a:latin typeface="Franklin Gothic Medium" panose="020B0603020102020204" pitchFamily="34" charset="0"/>
+              </a:rPr>
+              <a:t> </a:t>
+            </a:r>
+            <a:r>
+              <a:rPr lang="en-GB" dirty="0" err="1">
+                <a:solidFill>
+                  <a:schemeClr val="bg1"/>
+                </a:solidFill>
+                <a:latin typeface="Franklin Gothic Medium" panose="020B0603020102020204" pitchFamily="34" charset="0"/>
+              </a:rPr>
               <a:t>bos</a:t>
             </a:r>
             <a:r>
-              <a:rPr lang="en-GB" dirty="0"/>
-              <a:t> </a:t>
-            </a:r>
-            <a:r>
-              <a:rPr lang="en-GB" dirty="0" err="1"/>
+              <a:rPr lang="en-GB" dirty="0">
+                <a:solidFill>
+                  <a:schemeClr val="bg1"/>
+                </a:solidFill>
+                <a:latin typeface="Franklin Gothic Medium" panose="020B0603020102020204" pitchFamily="34" charset="0"/>
+              </a:rPr>
+              <a:t> </a:t>
+            </a:r>
+            <a:r>
+              <a:rPr lang="en-GB" dirty="0" err="1">
+                <a:solidFill>
+                  <a:schemeClr val="bg1"/>
+                </a:solidFill>
+                <a:latin typeface="Franklin Gothic Medium" panose="020B0603020102020204" pitchFamily="34" charset="0"/>
+              </a:rPr>
               <a:t>wanneer</a:t>
             </a:r>
             <a:r>
-              <a:rPr lang="en-GB" dirty="0"/>
-              <a:t> </a:t>
-            </a:r>
-            <a:r>
-              <a:rPr lang="en-GB" dirty="0" err="1"/>
+              <a:rPr lang="en-GB" dirty="0">
+                <a:solidFill>
+                  <a:schemeClr val="bg1"/>
+                </a:solidFill>
+                <a:latin typeface="Franklin Gothic Medium" panose="020B0603020102020204" pitchFamily="34" charset="0"/>
+              </a:rPr>
+              <a:t> </a:t>
+            </a:r>
+            <a:r>
+              <a:rPr lang="en-GB" dirty="0" err="1">
+                <a:solidFill>
+                  <a:schemeClr val="bg1"/>
+                </a:solidFill>
+                <a:latin typeface="Franklin Gothic Medium" panose="020B0603020102020204" pitchFamily="34" charset="0"/>
+              </a:rPr>
               <a:t>ik</a:t>
             </a:r>
             <a:r>
-              <a:rPr lang="en-GB" dirty="0"/>
-              <a:t> </a:t>
-            </a:r>
-            <a:r>
-              <a:rPr lang="en-GB" dirty="0" err="1"/>
+              <a:rPr lang="en-GB" dirty="0">
+                <a:solidFill>
+                  <a:schemeClr val="bg1"/>
+                </a:solidFill>
+                <a:latin typeface="Franklin Gothic Medium" panose="020B0603020102020204" pitchFamily="34" charset="0"/>
+              </a:rPr>
+              <a:t> </a:t>
+            </a:r>
+            <a:r>
+              <a:rPr lang="en-GB" dirty="0" err="1">
+                <a:solidFill>
+                  <a:schemeClr val="bg1"/>
+                </a:solidFill>
+                <a:latin typeface="Franklin Gothic Medium" panose="020B0603020102020204" pitchFamily="34" charset="0"/>
+              </a:rPr>
               <a:t>mij</a:t>
             </a:r>
             <a:r>
-              <a:rPr lang="en-GB" dirty="0"/>
-              <a:t> </a:t>
-            </a:r>
-            <a:r>
-              <a:rPr lang="en-GB" dirty="0" err="1"/>
+              <a:rPr lang="en-GB" dirty="0">
+                <a:solidFill>
+                  <a:schemeClr val="bg1"/>
+                </a:solidFill>
+                <a:latin typeface="Franklin Gothic Medium" panose="020B0603020102020204" pitchFamily="34" charset="0"/>
+              </a:rPr>
+              <a:t> </a:t>
+            </a:r>
+            <a:r>
+              <a:rPr lang="en-GB" dirty="0" err="1">
+                <a:solidFill>
+                  <a:schemeClr val="bg1"/>
+                </a:solidFill>
+                <a:latin typeface="Franklin Gothic Medium" panose="020B0603020102020204" pitchFamily="34" charset="0"/>
+              </a:rPr>
               <a:t>gefrustreerd</a:t>
             </a:r>
             <a:r>
-              <a:rPr lang="en-GB" dirty="0"/>
-              <a:t> </a:t>
-            </a:r>
-            <a:r>
-              <a:rPr lang="en-GB" dirty="0" err="1"/>
+              <a:rPr lang="en-GB" dirty="0">
+                <a:solidFill>
+                  <a:schemeClr val="bg1"/>
+                </a:solidFill>
+                <a:latin typeface="Franklin Gothic Medium" panose="020B0603020102020204" pitchFamily="34" charset="0"/>
+              </a:rPr>
+              <a:t> </a:t>
+            </a:r>
+            <a:r>
+              <a:rPr lang="en-GB" dirty="0" err="1">
+                <a:solidFill>
+                  <a:schemeClr val="bg1"/>
+                </a:solidFill>
+                <a:latin typeface="Franklin Gothic Medium" panose="020B0603020102020204" pitchFamily="34" charset="0"/>
+              </a:rPr>
               <a:t>voel</a:t>
             </a:r>
             <a:r>
-              <a:rPr lang="en-GB" dirty="0"/>
+              <a:rPr lang="en-GB" dirty="0">
+                <a:solidFill>
+                  <a:schemeClr val="bg1"/>
+                </a:solidFill>
+                <a:latin typeface="Franklin Gothic Medium" panose="020B0603020102020204" pitchFamily="34" charset="0"/>
+              </a:rPr>
               <a:t>, als </a:t>
             </a:r>
             <a:r>
-              <a:rPr lang="en-GB" dirty="0" err="1"/>
+              <a:rPr lang="en-GB" dirty="0" err="1">
+                <a:solidFill>
+                  <a:schemeClr val="bg1"/>
+                </a:solidFill>
+                <a:latin typeface="Franklin Gothic Medium" panose="020B0603020102020204" pitchFamily="34" charset="0"/>
+              </a:rPr>
               <a:t>ik</a:t>
             </a:r>
             <a:r>
-              <a:rPr lang="en-GB" dirty="0"/>
+              <a:rPr lang="en-GB" dirty="0">
+                <a:solidFill>
+                  <a:schemeClr val="bg1"/>
+                </a:solidFill>
+                <a:latin typeface="Franklin Gothic Medium" panose="020B0603020102020204" pitchFamily="34" charset="0"/>
+              </a:rPr>
               <a:t> in </a:t>
             </a:r>
             <a:r>
-              <a:rPr lang="en-GB" dirty="0" err="1"/>
+              <a:rPr lang="en-GB" dirty="0" err="1">
+                <a:solidFill>
+                  <a:schemeClr val="bg1"/>
+                </a:solidFill>
+                <a:latin typeface="Franklin Gothic Medium" panose="020B0603020102020204" pitchFamily="34" charset="0"/>
+              </a:rPr>
               <a:t>dat</a:t>
             </a:r>
             <a:r>
-              <a:rPr lang="en-GB" dirty="0"/>
-              <a:t> </a:t>
-            </a:r>
-            <a:r>
-              <a:rPr lang="en-GB" dirty="0" err="1"/>
+              <a:rPr lang="en-GB" dirty="0">
+                <a:solidFill>
+                  <a:schemeClr val="bg1"/>
+                </a:solidFill>
+                <a:latin typeface="Franklin Gothic Medium" panose="020B0603020102020204" pitchFamily="34" charset="0"/>
+              </a:rPr>
+              <a:t> </a:t>
+            </a:r>
+            <a:r>
+              <a:rPr lang="en-GB" dirty="0" err="1">
+                <a:solidFill>
+                  <a:schemeClr val="bg1"/>
+                </a:solidFill>
+                <a:latin typeface="Franklin Gothic Medium" panose="020B0603020102020204" pitchFamily="34" charset="0"/>
+              </a:rPr>
               <a:t>bos</a:t>
             </a:r>
             <a:r>
-              <a:rPr lang="en-GB" dirty="0"/>
-              <a:t> </a:t>
-            </a:r>
-            <a:r>
-              <a:rPr lang="en-GB" dirty="0" err="1"/>
+              <a:rPr lang="en-GB" dirty="0">
+                <a:solidFill>
+                  <a:schemeClr val="bg1"/>
+                </a:solidFill>
+                <a:latin typeface="Franklin Gothic Medium" panose="020B0603020102020204" pitchFamily="34" charset="0"/>
+              </a:rPr>
+              <a:t> </a:t>
+            </a:r>
+            <a:r>
+              <a:rPr lang="en-GB" dirty="0" err="1">
+                <a:solidFill>
+                  <a:schemeClr val="bg1"/>
+                </a:solidFill>
+                <a:latin typeface="Franklin Gothic Medium" panose="020B0603020102020204" pitchFamily="34" charset="0"/>
+              </a:rPr>
               <a:t>rondloop</a:t>
             </a:r>
             <a:r>
-              <a:rPr lang="en-GB" dirty="0"/>
-              <a:t> </a:t>
-            </a:r>
-            <a:r>
-              <a:rPr lang="en-GB" dirty="0" err="1"/>
+              <a:rPr lang="en-GB" dirty="0">
+                <a:solidFill>
+                  <a:schemeClr val="bg1"/>
+                </a:solidFill>
+                <a:latin typeface="Franklin Gothic Medium" panose="020B0603020102020204" pitchFamily="34" charset="0"/>
+              </a:rPr>
+              <a:t> </a:t>
+            </a:r>
+            <a:r>
+              <a:rPr lang="en-GB" dirty="0" err="1">
+                <a:solidFill>
+                  <a:schemeClr val="bg1"/>
+                </a:solidFill>
+                <a:latin typeface="Franklin Gothic Medium" panose="020B0603020102020204" pitchFamily="34" charset="0"/>
+              </a:rPr>
               <a:t>moet</a:t>
             </a:r>
             <a:r>
-              <a:rPr lang="en-GB" dirty="0"/>
-              <a:t> </a:t>
-            </a:r>
-            <a:r>
-              <a:rPr lang="en-GB" dirty="0" err="1"/>
+              <a:rPr lang="en-GB" dirty="0">
+                <a:solidFill>
+                  <a:schemeClr val="bg1"/>
+                </a:solidFill>
+                <a:latin typeface="Franklin Gothic Medium" panose="020B0603020102020204" pitchFamily="34" charset="0"/>
+              </a:rPr>
+              <a:t> </a:t>
+            </a:r>
+            <a:r>
+              <a:rPr lang="en-GB" dirty="0" err="1">
+                <a:solidFill>
+                  <a:schemeClr val="bg1"/>
+                </a:solidFill>
+                <a:latin typeface="Franklin Gothic Medium" panose="020B0603020102020204" pitchFamily="34" charset="0"/>
+              </a:rPr>
               <a:t>ik</a:t>
             </a:r>
             <a:r>
-              <a:rPr lang="en-GB" dirty="0"/>
-              <a:t> </a:t>
-            </a:r>
-            <a:r>
-              <a:rPr lang="en-GB" dirty="0" err="1"/>
+              <a:rPr lang="en-GB" dirty="0">
+                <a:solidFill>
+                  <a:schemeClr val="bg1"/>
+                </a:solidFill>
+                <a:latin typeface="Franklin Gothic Medium" panose="020B0603020102020204" pitchFamily="34" charset="0"/>
+              </a:rPr>
+              <a:t> </a:t>
+            </a:r>
+            <a:r>
+              <a:rPr lang="en-GB" dirty="0" err="1">
+                <a:solidFill>
+                  <a:schemeClr val="bg1"/>
+                </a:solidFill>
+                <a:latin typeface="Franklin Gothic Medium" panose="020B0603020102020204" pitchFamily="34" charset="0"/>
+              </a:rPr>
               <a:t>altijd</a:t>
             </a:r>
             <a:r>
-              <a:rPr lang="en-GB" dirty="0"/>
-              <a:t> </a:t>
-            </a:r>
-            <a:r>
-              <a:rPr lang="en-GB" dirty="0" err="1"/>
+              <a:rPr lang="en-GB" dirty="0">
+                <a:solidFill>
+                  <a:schemeClr val="bg1"/>
+                </a:solidFill>
+                <a:latin typeface="Franklin Gothic Medium" panose="020B0603020102020204" pitchFamily="34" charset="0"/>
+              </a:rPr>
+              <a:t> </a:t>
+            </a:r>
+            <a:r>
+              <a:rPr lang="en-GB" dirty="0" err="1">
+                <a:solidFill>
+                  <a:schemeClr val="bg1"/>
+                </a:solidFill>
+                <a:latin typeface="Franklin Gothic Medium" panose="020B0603020102020204" pitchFamily="34" charset="0"/>
+              </a:rPr>
               <a:t>denken</a:t>
             </a:r>
             <a:r>
-              <a:rPr lang="en-GB" dirty="0"/>
+              <a:rPr lang="en-GB" dirty="0">
+                <a:solidFill>
+                  <a:schemeClr val="bg1"/>
+                </a:solidFill>
+                <a:latin typeface="Franklin Gothic Medium" panose="020B0603020102020204" pitchFamily="34" charset="0"/>
+              </a:rPr>
               <a:t> aan hoe cool </a:t>
             </a:r>
             <a:r>
-              <a:rPr lang="en-GB" dirty="0" err="1"/>
+              <a:rPr lang="en-GB" dirty="0" err="1">
+                <a:solidFill>
+                  <a:schemeClr val="bg1"/>
+                </a:solidFill>
+                <a:latin typeface="Franklin Gothic Medium" panose="020B0603020102020204" pitchFamily="34" charset="0"/>
+              </a:rPr>
               <a:t>een</a:t>
             </a:r>
             <a:r>
-              <a:rPr lang="en-GB" dirty="0"/>
-              <a:t> </a:t>
-            </a:r>
-            <a:r>
-              <a:rPr lang="en-GB" dirty="0" err="1"/>
+              <a:rPr lang="en-GB" dirty="0">
+                <a:solidFill>
+                  <a:schemeClr val="bg1"/>
+                </a:solidFill>
+                <a:latin typeface="Franklin Gothic Medium" panose="020B0603020102020204" pitchFamily="34" charset="0"/>
+              </a:rPr>
+              <a:t> </a:t>
+            </a:r>
+            <a:r>
+              <a:rPr lang="en-GB" dirty="0" err="1">
+                <a:solidFill>
+                  <a:schemeClr val="bg1"/>
+                </a:solidFill>
+                <a:latin typeface="Franklin Gothic Medium" panose="020B0603020102020204" pitchFamily="34" charset="0"/>
+              </a:rPr>
               <a:t>mysterieuze</a:t>
             </a:r>
             <a:r>
-              <a:rPr lang="en-GB" dirty="0"/>
-              <a:t> </a:t>
-            </a:r>
-            <a:r>
-              <a:rPr lang="en-GB" dirty="0" err="1"/>
+              <a:rPr lang="en-GB" dirty="0">
+                <a:solidFill>
+                  <a:schemeClr val="bg1"/>
+                </a:solidFill>
+                <a:latin typeface="Franklin Gothic Medium" panose="020B0603020102020204" pitchFamily="34" charset="0"/>
+              </a:rPr>
+              <a:t> </a:t>
+            </a:r>
+            <a:r>
+              <a:rPr lang="en-GB" dirty="0" err="1">
+                <a:solidFill>
+                  <a:schemeClr val="bg1"/>
+                </a:solidFill>
+                <a:latin typeface="Franklin Gothic Medium" panose="020B0603020102020204" pitchFamily="34" charset="0"/>
+              </a:rPr>
               <a:t>serie</a:t>
             </a:r>
             <a:r>
-              <a:rPr lang="en-GB" dirty="0"/>
+              <a:rPr lang="en-GB" dirty="0">
+                <a:solidFill>
+                  <a:schemeClr val="bg1"/>
+                </a:solidFill>
+                <a:latin typeface="Franklin Gothic Medium" panose="020B0603020102020204" pitchFamily="34" charset="0"/>
+              </a:rPr>
               <a:t> of film </a:t>
             </a:r>
             <a:r>
-              <a:rPr lang="en-GB" dirty="0" err="1"/>
+              <a:rPr lang="en-GB" dirty="0" err="1">
+                <a:solidFill>
+                  <a:schemeClr val="bg1"/>
+                </a:solidFill>
+                <a:latin typeface="Franklin Gothic Medium" panose="020B0603020102020204" pitchFamily="34" charset="0"/>
+              </a:rPr>
               <a:t>gelijk</a:t>
             </a:r>
             <a:r>
-              <a:rPr lang="en-GB" dirty="0"/>
+              <a:rPr lang="en-GB" dirty="0">
+                <a:solidFill>
+                  <a:schemeClr val="bg1"/>
+                </a:solidFill>
+                <a:latin typeface="Franklin Gothic Medium" panose="020B0603020102020204" pitchFamily="34" charset="0"/>
+              </a:rPr>
               <a:t> Twin Peaks </a:t>
             </a:r>
             <a:r>
-              <a:rPr lang="en-GB" dirty="0" err="1"/>
+              <a:rPr lang="en-GB" dirty="0" err="1">
+                <a:solidFill>
+                  <a:schemeClr val="bg1"/>
+                </a:solidFill>
+                <a:latin typeface="Franklin Gothic Medium" panose="020B0603020102020204" pitchFamily="34" charset="0"/>
+              </a:rPr>
               <a:t>daar</a:t>
             </a:r>
             <a:r>
-              <a:rPr lang="en-GB" dirty="0"/>
-              <a:t> </a:t>
-            </a:r>
-            <a:r>
-              <a:rPr lang="en-GB" dirty="0" err="1"/>
+              <a:rPr lang="en-GB" dirty="0">
+                <a:solidFill>
+                  <a:schemeClr val="bg1"/>
+                </a:solidFill>
+                <a:latin typeface="Franklin Gothic Medium" panose="020B0603020102020204" pitchFamily="34" charset="0"/>
+              </a:rPr>
+              <a:t> </a:t>
+            </a:r>
+            <a:r>
+              <a:rPr lang="en-GB" dirty="0" err="1">
+                <a:solidFill>
+                  <a:schemeClr val="bg1"/>
+                </a:solidFill>
+                <a:latin typeface="Franklin Gothic Medium" panose="020B0603020102020204" pitchFamily="34" charset="0"/>
+              </a:rPr>
               <a:t>zou</a:t>
             </a:r>
             <a:r>
-              <a:rPr lang="en-GB" dirty="0"/>
-              <a:t> </a:t>
-            </a:r>
-            <a:r>
-              <a:rPr lang="en-GB" dirty="0" err="1"/>
+              <a:rPr lang="en-GB" dirty="0">
+                <a:solidFill>
+                  <a:schemeClr val="bg1"/>
+                </a:solidFill>
+                <a:latin typeface="Franklin Gothic Medium" panose="020B0603020102020204" pitchFamily="34" charset="0"/>
+              </a:rPr>
+              <a:t> </a:t>
+            </a:r>
+            <a:r>
+              <a:rPr lang="en-GB" dirty="0" err="1">
+                <a:solidFill>
+                  <a:schemeClr val="bg1"/>
+                </a:solidFill>
+                <a:latin typeface="Franklin Gothic Medium" panose="020B0603020102020204" pitchFamily="34" charset="0"/>
+              </a:rPr>
               <a:t>zijn</a:t>
             </a:r>
             <a:r>
-              <a:rPr lang="en-GB" dirty="0"/>
+              <a:rPr lang="en-GB" dirty="0">
+                <a:solidFill>
+                  <a:schemeClr val="bg1"/>
+                </a:solidFill>
+                <a:latin typeface="Franklin Gothic Medium" panose="020B0603020102020204" pitchFamily="34" charset="0"/>
+              </a:rPr>
               <a:t>.</a:t>
             </a:r>
-            <a:endParaRPr lang="nl-BE" dirty="0"/>
+            <a:endParaRPr lang="nl-BE" dirty="0">
+              <a:solidFill>
+                <a:schemeClr val="bg1"/>
+              </a:solidFill>
+              <a:latin typeface="Franklin Gothic Medium" panose="020B0603020102020204" pitchFamily="34" charset="0"/>
+            </a:endParaRPr>
           </a:p>
         </p:txBody>
       </p:sp>
@@ -4380,7 +4919,7 @@
         </p:spPr>
         <p:txBody>
           <a:bodyPr>
-            <a:normAutofit fontScale="92500" lnSpcReduction="20000"/>
+            <a:normAutofit fontScale="92500" lnSpcReduction="10000"/>
           </a:bodyPr>
           <a:lstStyle/>
           <a:p>
@@ -4388,30 +4927,65 @@
               <a:buNone/>
             </a:pPr>
             <a:r>
-              <a:rPr lang="en-GB" dirty="0" err="1"/>
+              <a:rPr lang="en-GB" dirty="0" err="1">
+                <a:solidFill>
+                  <a:schemeClr val="bg1"/>
+                </a:solidFill>
+                <a:latin typeface="Franklin Gothic Medium" panose="020B0603020102020204" pitchFamily="34" charset="0"/>
+              </a:rPr>
               <a:t>Waar</a:t>
             </a:r>
             <a:r>
-              <a:rPr lang="en-GB" dirty="0"/>
-              <a:t> </a:t>
-            </a:r>
-            <a:r>
-              <a:rPr lang="en-GB" dirty="0" err="1"/>
+              <a:rPr lang="en-GB" dirty="0">
+                <a:solidFill>
+                  <a:schemeClr val="bg1"/>
+                </a:solidFill>
+                <a:latin typeface="Franklin Gothic Medium" panose="020B0603020102020204" pitchFamily="34" charset="0"/>
+              </a:rPr>
+              <a:t> </a:t>
+            </a:r>
+            <a:r>
+              <a:rPr lang="en-GB" dirty="0" err="1">
+                <a:solidFill>
+                  <a:schemeClr val="bg1"/>
+                </a:solidFill>
+                <a:latin typeface="Franklin Gothic Medium" panose="020B0603020102020204" pitchFamily="34" charset="0"/>
+              </a:rPr>
               <a:t>komt</a:t>
             </a:r>
             <a:r>
-              <a:rPr lang="en-GB" dirty="0"/>
+              <a:rPr lang="en-GB" dirty="0">
+                <a:solidFill>
+                  <a:schemeClr val="bg1"/>
+                </a:solidFill>
+                <a:latin typeface="Franklin Gothic Medium" panose="020B0603020102020204" pitchFamily="34" charset="0"/>
+              </a:rPr>
               <a:t> het idee </a:t>
             </a:r>
             <a:r>
-              <a:rPr lang="en-GB" dirty="0" err="1"/>
+              <a:rPr lang="en-GB" dirty="0" err="1">
+                <a:solidFill>
+                  <a:schemeClr val="bg1"/>
+                </a:solidFill>
+                <a:latin typeface="Franklin Gothic Medium" panose="020B0603020102020204" pitchFamily="34" charset="0"/>
+              </a:rPr>
               <a:t>vandaan</a:t>
             </a:r>
             <a:r>
-              <a:rPr lang="en-GB" dirty="0"/>
+              <a:rPr lang="en-GB" dirty="0">
+                <a:solidFill>
+                  <a:schemeClr val="bg1"/>
+                </a:solidFill>
+                <a:latin typeface="Franklin Gothic Medium" panose="020B0603020102020204" pitchFamily="34" charset="0"/>
+              </a:rPr>
               <a:t>?</a:t>
             </a:r>
-            <a:endParaRPr lang="nl-BE" dirty="0"/>
+            <a:endParaRPr lang="nl-BE" dirty="0">
+              <a:solidFill>
+                <a:schemeClr val="bg1"/>
+              </a:solidFill>
+              <a:latin typeface="Franklin Gothic Medium" panose="020B0603020102020204" pitchFamily="34" charset="0"/>
+            </a:endParaRPr>
           </a:p>
         </p:txBody>
       </p:sp>
@@ -4431,6 +5005,14 @@
 <file path=ppt/slides/slide4.xml><?xml version="1.0" encoding="utf-8"?>
 <p:sld xmlns:a="http://schemas.openxmlformats.org/drawingml/2006/main" xmlns:r="http://schemas.openxmlformats.org/officeDocument/2006/relationships" xmlns:p="http://schemas.openxmlformats.org/presentationml/2006/main">
   <p:cSld>
+    <p:bg>
+      <p:bgPr>
+        <a:solidFill>
+          <a:schemeClr val="tx1"/>
+        </a:solidFill>
+        <a:effectLst/>
+      </p:bgPr>
+    </p:bg>
     <p:spTree>
       <p:nvGrpSpPr>
         <p:cNvPr id="1" name="">
@@ -4480,137 +5062,307 @@
           <a:lstStyle/>
           <a:p>
             <a:r>
-              <a:rPr lang="en-GB" b="1" dirty="0"/>
+              <a:rPr lang="en-GB" b="1" dirty="0">
+                <a:solidFill>
+                  <a:schemeClr val="bg1"/>
+                </a:solidFill>
+                <a:latin typeface="Franklin Gothic Medium" panose="020B0603020102020204" pitchFamily="34" charset="0"/>
+              </a:rPr>
               <a:t>De student</a:t>
             </a:r>
             <a:br>
-              <a:rPr lang="en-GB" dirty="0"/>
+              <a:rPr lang="en-GB" dirty="0">
+                <a:solidFill>
+                  <a:schemeClr val="bg1"/>
+                </a:solidFill>
+                <a:latin typeface="Franklin Gothic Medium" panose="020B0603020102020204" pitchFamily="34" charset="0"/>
+              </a:rPr>
             </a:br>
             <a:r>
-              <a:rPr lang="en-GB" dirty="0"/>
+              <a:rPr lang="en-GB" dirty="0">
+                <a:solidFill>
+                  <a:schemeClr val="bg1"/>
+                </a:solidFill>
+                <a:latin typeface="Franklin Gothic Medium" panose="020B0603020102020204" pitchFamily="34" charset="0"/>
+              </a:rPr>
               <a:t>De student is de protagonist in het </a:t>
             </a:r>
             <a:r>
-              <a:rPr lang="en-GB" dirty="0" err="1"/>
+              <a:rPr lang="en-GB" dirty="0" err="1">
+                <a:solidFill>
+                  <a:schemeClr val="bg1"/>
+                </a:solidFill>
+                <a:latin typeface="Franklin Gothic Medium" panose="020B0603020102020204" pitchFamily="34" charset="0"/>
+              </a:rPr>
               <a:t>verhaal</a:t>
             </a:r>
             <a:r>
-              <a:rPr lang="en-GB" dirty="0"/>
+              <a:rPr lang="en-GB" dirty="0">
+                <a:solidFill>
+                  <a:schemeClr val="bg1"/>
+                </a:solidFill>
+                <a:latin typeface="Franklin Gothic Medium" panose="020B0603020102020204" pitchFamily="34" charset="0"/>
+              </a:rPr>
               <a:t>, </a:t>
             </a:r>
             <a:r>
-              <a:rPr lang="en-GB" dirty="0" err="1"/>
+              <a:rPr lang="en-GB" dirty="0" err="1">
+                <a:solidFill>
+                  <a:schemeClr val="bg1"/>
+                </a:solidFill>
+                <a:latin typeface="Franklin Gothic Medium" panose="020B0603020102020204" pitchFamily="34" charset="0"/>
+              </a:rPr>
               <a:t>hij</a:t>
             </a:r>
             <a:r>
-              <a:rPr lang="en-GB" dirty="0"/>
-              <a:t> </a:t>
-            </a:r>
-            <a:r>
-              <a:rPr lang="en-GB" dirty="0" err="1"/>
+              <a:rPr lang="en-GB" dirty="0">
+                <a:solidFill>
+                  <a:schemeClr val="bg1"/>
+                </a:solidFill>
+                <a:latin typeface="Franklin Gothic Medium" panose="020B0603020102020204" pitchFamily="34" charset="0"/>
+              </a:rPr>
+              <a:t> </a:t>
+            </a:r>
+            <a:r>
+              <a:rPr lang="en-GB" dirty="0" err="1">
+                <a:solidFill>
+                  <a:schemeClr val="bg1"/>
+                </a:solidFill>
+                <a:latin typeface="Franklin Gothic Medium" panose="020B0603020102020204" pitchFamily="34" charset="0"/>
+              </a:rPr>
               <a:t>voelt</a:t>
             </a:r>
             <a:r>
-              <a:rPr lang="en-GB" dirty="0"/>
-              <a:t> </a:t>
-            </a:r>
-            <a:r>
-              <a:rPr lang="en-GB" dirty="0" err="1"/>
+              <a:rPr lang="en-GB" dirty="0">
+                <a:solidFill>
+                  <a:schemeClr val="bg1"/>
+                </a:solidFill>
+                <a:latin typeface="Franklin Gothic Medium" panose="020B0603020102020204" pitchFamily="34" charset="0"/>
+              </a:rPr>
+              <a:t> </a:t>
+            </a:r>
+            <a:r>
+              <a:rPr lang="en-GB" dirty="0" err="1">
+                <a:solidFill>
+                  <a:schemeClr val="bg1"/>
+                </a:solidFill>
+                <a:latin typeface="Franklin Gothic Medium" panose="020B0603020102020204" pitchFamily="34" charset="0"/>
+              </a:rPr>
               <a:t>zich</a:t>
             </a:r>
             <a:r>
-              <a:rPr lang="en-GB" dirty="0"/>
-              <a:t> </a:t>
-            </a:r>
-            <a:r>
-              <a:rPr lang="en-GB" dirty="0" err="1"/>
+              <a:rPr lang="en-GB" dirty="0">
+                <a:solidFill>
+                  <a:schemeClr val="bg1"/>
+                </a:solidFill>
+                <a:latin typeface="Franklin Gothic Medium" panose="020B0603020102020204" pitchFamily="34" charset="0"/>
+              </a:rPr>
+              <a:t> </a:t>
+            </a:r>
+            <a:r>
+              <a:rPr lang="en-GB" dirty="0" err="1">
+                <a:solidFill>
+                  <a:schemeClr val="bg1"/>
+                </a:solidFill>
+                <a:latin typeface="Franklin Gothic Medium" panose="020B0603020102020204" pitchFamily="34" charset="0"/>
+              </a:rPr>
               <a:t>verloren</a:t>
             </a:r>
             <a:r>
-              <a:rPr lang="en-GB" dirty="0"/>
+              <a:rPr lang="en-GB" dirty="0">
+                <a:solidFill>
+                  <a:schemeClr val="bg1"/>
+                </a:solidFill>
+                <a:latin typeface="Franklin Gothic Medium" panose="020B0603020102020204" pitchFamily="34" charset="0"/>
+              </a:rPr>
               <a:t> in </a:t>
             </a:r>
             <a:r>
-              <a:rPr lang="en-GB" dirty="0" err="1"/>
+              <a:rPr lang="en-GB" dirty="0" err="1">
+                <a:solidFill>
+                  <a:schemeClr val="bg1"/>
+                </a:solidFill>
+                <a:latin typeface="Franklin Gothic Medium" panose="020B0603020102020204" pitchFamily="34" charset="0"/>
+              </a:rPr>
               <a:t>zijn</a:t>
             </a:r>
             <a:r>
-              <a:rPr lang="en-GB" dirty="0"/>
-              <a:t> </a:t>
-            </a:r>
-            <a:r>
-              <a:rPr lang="en-GB" dirty="0" err="1"/>
+              <a:rPr lang="en-GB" dirty="0">
+                <a:solidFill>
+                  <a:schemeClr val="bg1"/>
+                </a:solidFill>
+                <a:latin typeface="Franklin Gothic Medium" panose="020B0603020102020204" pitchFamily="34" charset="0"/>
+              </a:rPr>
+              <a:t> </a:t>
+            </a:r>
+            <a:r>
+              <a:rPr lang="en-GB" dirty="0" err="1">
+                <a:solidFill>
+                  <a:schemeClr val="bg1"/>
+                </a:solidFill>
+                <a:latin typeface="Franklin Gothic Medium" panose="020B0603020102020204" pitchFamily="34" charset="0"/>
+              </a:rPr>
               <a:t>frustratie</a:t>
             </a:r>
             <a:r>
-              <a:rPr lang="en-GB" dirty="0"/>
+              <a:rPr lang="en-GB" dirty="0">
+                <a:solidFill>
+                  <a:schemeClr val="bg1"/>
+                </a:solidFill>
+                <a:latin typeface="Franklin Gothic Medium" panose="020B0603020102020204" pitchFamily="34" charset="0"/>
+              </a:rPr>
               <a:t> en </a:t>
             </a:r>
             <a:r>
-              <a:rPr lang="en-GB" dirty="0" err="1"/>
+              <a:rPr lang="en-GB" dirty="0" err="1">
+                <a:solidFill>
+                  <a:schemeClr val="bg1"/>
+                </a:solidFill>
+                <a:latin typeface="Franklin Gothic Medium" panose="020B0603020102020204" pitchFamily="34" charset="0"/>
+              </a:rPr>
               <a:t>gaat</a:t>
             </a:r>
             <a:r>
-              <a:rPr lang="en-GB" dirty="0"/>
-              <a:t> </a:t>
-            </a:r>
-            <a:r>
-              <a:rPr lang="en-GB" dirty="0" err="1"/>
+              <a:rPr lang="en-GB" dirty="0">
+                <a:solidFill>
+                  <a:schemeClr val="bg1"/>
+                </a:solidFill>
+                <a:latin typeface="Franklin Gothic Medium" panose="020B0603020102020204" pitchFamily="34" charset="0"/>
+              </a:rPr>
+              <a:t> </a:t>
+            </a:r>
+            <a:r>
+              <a:rPr lang="en-GB" dirty="0" err="1">
+                <a:solidFill>
+                  <a:schemeClr val="bg1"/>
+                </a:solidFill>
+                <a:latin typeface="Franklin Gothic Medium" panose="020B0603020102020204" pitchFamily="34" charset="0"/>
+              </a:rPr>
               <a:t>hierdoor</a:t>
             </a:r>
             <a:r>
-              <a:rPr lang="en-GB" dirty="0"/>
+              <a:rPr lang="en-GB" dirty="0">
+                <a:solidFill>
+                  <a:schemeClr val="bg1"/>
+                </a:solidFill>
+                <a:latin typeface="Franklin Gothic Medium" panose="020B0603020102020204" pitchFamily="34" charset="0"/>
+              </a:rPr>
               <a:t> naar </a:t>
             </a:r>
             <a:r>
-              <a:rPr lang="en-GB" dirty="0" err="1"/>
+              <a:rPr lang="en-GB" dirty="0" err="1">
+                <a:solidFill>
+                  <a:schemeClr val="bg1"/>
+                </a:solidFill>
+                <a:latin typeface="Franklin Gothic Medium" panose="020B0603020102020204" pitchFamily="34" charset="0"/>
+              </a:rPr>
               <a:t>een</a:t>
             </a:r>
             <a:r>
-              <a:rPr lang="en-GB" dirty="0"/>
-              <a:t> </a:t>
-            </a:r>
-            <a:r>
-              <a:rPr lang="en-GB" dirty="0" err="1"/>
+              <a:rPr lang="en-GB" dirty="0">
+                <a:solidFill>
+                  <a:schemeClr val="bg1"/>
+                </a:solidFill>
+                <a:latin typeface="Franklin Gothic Medium" panose="020B0603020102020204" pitchFamily="34" charset="0"/>
+              </a:rPr>
+              <a:t> </a:t>
+            </a:r>
+            <a:r>
+              <a:rPr lang="en-GB" dirty="0" err="1">
+                <a:solidFill>
+                  <a:schemeClr val="bg1"/>
+                </a:solidFill>
+                <a:latin typeface="Franklin Gothic Medium" panose="020B0603020102020204" pitchFamily="34" charset="0"/>
+              </a:rPr>
               <a:t>bos</a:t>
             </a:r>
             <a:r>
-              <a:rPr lang="en-GB" dirty="0"/>
+              <a:rPr lang="en-GB" dirty="0">
+                <a:solidFill>
+                  <a:schemeClr val="bg1"/>
+                </a:solidFill>
+                <a:latin typeface="Franklin Gothic Medium" panose="020B0603020102020204" pitchFamily="34" charset="0"/>
+              </a:rPr>
               <a:t> die hem op </a:t>
             </a:r>
             <a:r>
-              <a:rPr lang="en-GB" dirty="0" err="1"/>
+              <a:rPr lang="en-GB" dirty="0" err="1">
+                <a:solidFill>
+                  <a:schemeClr val="bg1"/>
+                </a:solidFill>
+                <a:latin typeface="Franklin Gothic Medium" panose="020B0603020102020204" pitchFamily="34" charset="0"/>
+              </a:rPr>
               <a:t>een</a:t>
             </a:r>
             <a:r>
-              <a:rPr lang="en-GB" dirty="0"/>
-              <a:t> </a:t>
-            </a:r>
-            <a:r>
-              <a:rPr lang="en-GB" dirty="0" err="1"/>
+              <a:rPr lang="en-GB" dirty="0">
+                <a:solidFill>
+                  <a:schemeClr val="bg1"/>
+                </a:solidFill>
+                <a:latin typeface="Franklin Gothic Medium" panose="020B0603020102020204" pitchFamily="34" charset="0"/>
+              </a:rPr>
+              <a:t> </a:t>
+            </a:r>
+            <a:r>
+              <a:rPr lang="en-GB" dirty="0" err="1">
+                <a:solidFill>
+                  <a:schemeClr val="bg1"/>
+                </a:solidFill>
+                <a:latin typeface="Franklin Gothic Medium" panose="020B0603020102020204" pitchFamily="34" charset="0"/>
+              </a:rPr>
               <a:t>fysieke</a:t>
             </a:r>
             <a:r>
-              <a:rPr lang="en-GB" dirty="0"/>
+              <a:rPr lang="en-GB" dirty="0">
+                <a:solidFill>
+                  <a:schemeClr val="bg1"/>
+                </a:solidFill>
+                <a:latin typeface="Franklin Gothic Medium" panose="020B0603020102020204" pitchFamily="34" charset="0"/>
+              </a:rPr>
               <a:t> en </a:t>
             </a:r>
             <a:r>
-              <a:rPr lang="en-GB" dirty="0" err="1"/>
+              <a:rPr lang="en-GB" dirty="0" err="1">
+                <a:solidFill>
+                  <a:schemeClr val="bg1"/>
+                </a:solidFill>
+                <a:latin typeface="Franklin Gothic Medium" panose="020B0603020102020204" pitchFamily="34" charset="0"/>
+              </a:rPr>
               <a:t>emotionele</a:t>
             </a:r>
             <a:r>
-              <a:rPr lang="en-GB" dirty="0"/>
+              <a:rPr lang="en-GB" dirty="0">
+                <a:solidFill>
+                  <a:schemeClr val="bg1"/>
+                </a:solidFill>
+                <a:latin typeface="Franklin Gothic Medium" panose="020B0603020102020204" pitchFamily="34" charset="0"/>
+              </a:rPr>
               <a:t> reis </a:t>
             </a:r>
             <a:r>
-              <a:rPr lang="en-GB" dirty="0" err="1"/>
+              <a:rPr lang="en-GB" dirty="0" err="1">
+                <a:solidFill>
+                  <a:schemeClr val="bg1"/>
+                </a:solidFill>
+                <a:latin typeface="Franklin Gothic Medium" panose="020B0603020102020204" pitchFamily="34" charset="0"/>
+              </a:rPr>
               <a:t>neemt</a:t>
             </a:r>
             <a:r>
-              <a:rPr lang="en-GB" dirty="0"/>
+              <a:rPr lang="en-GB" dirty="0">
+                <a:solidFill>
+                  <a:schemeClr val="bg1"/>
+                </a:solidFill>
+                <a:latin typeface="Franklin Gothic Medium" panose="020B0603020102020204" pitchFamily="34" charset="0"/>
+              </a:rPr>
               <a:t>.</a:t>
             </a:r>
-            <a:endParaRPr lang="nl-BE" dirty="0"/>
+            <a:endParaRPr lang="nl-BE" dirty="0">
+              <a:solidFill>
+                <a:schemeClr val="bg1"/>
+              </a:solidFill>
+              <a:latin typeface="Franklin Gothic Medium" panose="020B0603020102020204" pitchFamily="34" charset="0"/>
+            </a:endParaRPr>
           </a:p>
         </p:txBody>
       </p:sp>
@@ -4638,7 +5390,7 @@
         </p:spPr>
         <p:txBody>
           <a:bodyPr>
-            <a:normAutofit fontScale="92500" lnSpcReduction="20000"/>
+            <a:normAutofit fontScale="92500" lnSpcReduction="10000"/>
           </a:bodyPr>
           <a:lstStyle/>
           <a:p>
@@ -4646,30 +5398,65 @@
               <a:buNone/>
             </a:pPr>
             <a:r>
-              <a:rPr lang="en-GB" dirty="0" err="1"/>
+              <a:rPr lang="en-GB" dirty="0" err="1">
+                <a:solidFill>
+                  <a:schemeClr val="bg1"/>
+                </a:solidFill>
+                <a:latin typeface="Franklin Gothic Medium" panose="020B0603020102020204" pitchFamily="34" charset="0"/>
+              </a:rPr>
               <a:t>Waar</a:t>
             </a:r>
             <a:r>
-              <a:rPr lang="en-GB" dirty="0"/>
-              <a:t> </a:t>
-            </a:r>
-            <a:r>
-              <a:rPr lang="en-GB" dirty="0" err="1"/>
+              <a:rPr lang="en-GB" dirty="0">
+                <a:solidFill>
+                  <a:schemeClr val="bg1"/>
+                </a:solidFill>
+                <a:latin typeface="Franklin Gothic Medium" panose="020B0603020102020204" pitchFamily="34" charset="0"/>
+              </a:rPr>
+              <a:t> </a:t>
+            </a:r>
+            <a:r>
+              <a:rPr lang="en-GB" dirty="0" err="1">
+                <a:solidFill>
+                  <a:schemeClr val="bg1"/>
+                </a:solidFill>
+                <a:latin typeface="Franklin Gothic Medium" panose="020B0603020102020204" pitchFamily="34" charset="0"/>
+              </a:rPr>
               <a:t>rond</a:t>
             </a:r>
             <a:r>
-              <a:rPr lang="en-GB" dirty="0"/>
-              <a:t> </a:t>
-            </a:r>
-            <a:r>
-              <a:rPr lang="en-GB" dirty="0" err="1"/>
+              <a:rPr lang="en-GB" dirty="0">
+                <a:solidFill>
+                  <a:schemeClr val="bg1"/>
+                </a:solidFill>
+                <a:latin typeface="Franklin Gothic Medium" panose="020B0603020102020204" pitchFamily="34" charset="0"/>
+              </a:rPr>
+              <a:t> </a:t>
+            </a:r>
+            <a:r>
+              <a:rPr lang="en-GB" dirty="0" err="1">
+                <a:solidFill>
+                  <a:schemeClr val="bg1"/>
+                </a:solidFill>
+                <a:latin typeface="Franklin Gothic Medium" panose="020B0603020102020204" pitchFamily="34" charset="0"/>
+              </a:rPr>
               <a:t>draait</a:t>
             </a:r>
             <a:r>
-              <a:rPr lang="en-GB" dirty="0"/>
+              <a:rPr lang="en-GB" dirty="0">
+                <a:solidFill>
+                  <a:schemeClr val="bg1"/>
+                </a:solidFill>
+                <a:latin typeface="Franklin Gothic Medium" panose="020B0603020102020204" pitchFamily="34" charset="0"/>
+              </a:rPr>
               <a:t> de video?</a:t>
             </a:r>
-            <a:endParaRPr lang="nl-BE" dirty="0"/>
+            <a:endParaRPr lang="nl-BE" dirty="0">
+              <a:solidFill>
+                <a:schemeClr val="bg1"/>
+              </a:solidFill>
+              <a:latin typeface="Franklin Gothic Medium" panose="020B0603020102020204" pitchFamily="34" charset="0"/>
+            </a:endParaRPr>
           </a:p>
         </p:txBody>
       </p:sp>
@@ -4689,6 +5476,14 @@
 <file path=ppt/slides/slide5.xml><?xml version="1.0" encoding="utf-8"?>
 <p:sld xmlns:a="http://schemas.openxmlformats.org/drawingml/2006/main" xmlns:r="http://schemas.openxmlformats.org/officeDocument/2006/relationships" xmlns:p="http://schemas.openxmlformats.org/presentationml/2006/main">
   <p:cSld>
+    <p:bg>
+      <p:bgPr>
+        <a:solidFill>
+          <a:schemeClr val="tx1"/>
+        </a:solidFill>
+        <a:effectLst/>
+      </p:bgPr>
+    </p:bg>
     <p:spTree>
       <p:nvGrpSpPr>
         <p:cNvPr id="1" name="">
@@ -4738,201 +5533,397 @@
           <a:lstStyle/>
           <a:p>
             <a:r>
-              <a:rPr lang="en-GB" b="1" dirty="0"/>
-              <a:t>De loop </a:t>
-            </a:r>
-            <a:r>
-              <a:rPr lang="en-GB" b="1" dirty="0" err="1"/>
+              <a:rPr lang="en-GB" b="1" dirty="0">
+                <a:solidFill>
+                  <a:schemeClr val="bg1"/>
+                </a:solidFill>
+                <a:latin typeface="Franklin Gothic Medium" panose="020B0603020102020204" pitchFamily="34" charset="0"/>
+              </a:rPr>
+              <a:t>De “loop” </a:t>
+            </a:r>
+            <a:r>
+              <a:rPr lang="en-GB" b="1" dirty="0" err="1">
+                <a:solidFill>
+                  <a:schemeClr val="bg1"/>
+                </a:solidFill>
+                <a:latin typeface="Franklin Gothic Medium" panose="020B0603020102020204" pitchFamily="34" charset="0"/>
+              </a:rPr>
               <a:t>versie</a:t>
             </a:r>
             <a:r>
-              <a:rPr lang="en-GB" b="1" dirty="0"/>
+              <a:rPr lang="en-GB" b="1" dirty="0">
+                <a:solidFill>
+                  <a:schemeClr val="bg1"/>
+                </a:solidFill>
+                <a:latin typeface="Franklin Gothic Medium" panose="020B0603020102020204" pitchFamily="34" charset="0"/>
+              </a:rPr>
               <a:t> van de student</a:t>
             </a:r>
             <a:br>
-              <a:rPr lang="en-GB" dirty="0"/>
+              <a:rPr lang="en-GB" dirty="0">
+                <a:solidFill>
+                  <a:schemeClr val="bg1"/>
+                </a:solidFill>
+                <a:latin typeface="Franklin Gothic Medium" panose="020B0603020102020204" pitchFamily="34" charset="0"/>
+              </a:rPr>
             </a:br>
             <a:r>
-              <a:rPr lang="en-GB" dirty="0"/>
+              <a:rPr lang="en-GB" dirty="0">
+                <a:solidFill>
+                  <a:schemeClr val="bg1"/>
+                </a:solidFill>
+                <a:latin typeface="Franklin Gothic Medium" panose="020B0603020102020204" pitchFamily="34" charset="0"/>
+              </a:rPr>
               <a:t>De student zit vast in het </a:t>
             </a:r>
             <a:r>
-              <a:rPr lang="en-GB" dirty="0" err="1"/>
+              <a:rPr lang="en-GB" dirty="0" err="1">
+                <a:solidFill>
+                  <a:schemeClr val="bg1"/>
+                </a:solidFill>
+                <a:latin typeface="Franklin Gothic Medium" panose="020B0603020102020204" pitchFamily="34" charset="0"/>
+              </a:rPr>
               <a:t>bos</a:t>
             </a:r>
             <a:r>
-              <a:rPr lang="en-GB" dirty="0"/>
-              <a:t> in </a:t>
-            </a:r>
-            <a:r>
-              <a:rPr lang="en-GB" dirty="0" err="1"/>
-              <a:t>een</a:t>
-            </a:r>
-            <a:r>
-              <a:rPr lang="en-GB" dirty="0"/>
-              <a:t> loop, in het </a:t>
-            </a:r>
-            <a:r>
-              <a:rPr lang="en-GB" dirty="0" err="1"/>
+              <a:rPr lang="en-GB" dirty="0">
+                <a:solidFill>
+                  <a:schemeClr val="bg1"/>
+                </a:solidFill>
+                <a:latin typeface="Franklin Gothic Medium" panose="020B0603020102020204" pitchFamily="34" charset="0"/>
+              </a:rPr>
+              <a:t> in een loop, in het </a:t>
+            </a:r>
+            <a:r>
+              <a:rPr lang="en-GB" dirty="0" err="1">
+                <a:solidFill>
+                  <a:schemeClr val="bg1"/>
+                </a:solidFill>
+                <a:latin typeface="Franklin Gothic Medium" panose="020B0603020102020204" pitchFamily="34" charset="0"/>
+              </a:rPr>
               <a:t>bos</a:t>
             </a:r>
             <a:r>
-              <a:rPr lang="en-GB" dirty="0"/>
-              <a:t> </a:t>
-            </a:r>
-            <a:r>
-              <a:rPr lang="en-GB" dirty="0" err="1"/>
+              <a:rPr lang="en-GB" dirty="0">
+                <a:solidFill>
+                  <a:schemeClr val="bg1"/>
+                </a:solidFill>
+                <a:latin typeface="Franklin Gothic Medium" panose="020B0603020102020204" pitchFamily="34" charset="0"/>
+              </a:rPr>
+              <a:t> </a:t>
+            </a:r>
+            <a:r>
+              <a:rPr lang="en-GB" dirty="0" err="1">
+                <a:solidFill>
+                  <a:schemeClr val="bg1"/>
+                </a:solidFill>
+                <a:latin typeface="Franklin Gothic Medium" panose="020B0603020102020204" pitchFamily="34" charset="0"/>
+              </a:rPr>
               <a:t>ziet</a:t>
             </a:r>
             <a:r>
-              <a:rPr lang="en-GB" dirty="0"/>
-              <a:t> </a:t>
-            </a:r>
-            <a:r>
-              <a:rPr lang="en-GB" dirty="0" err="1"/>
+              <a:rPr lang="en-GB" dirty="0">
+                <a:solidFill>
+                  <a:schemeClr val="bg1"/>
+                </a:solidFill>
+                <a:latin typeface="Franklin Gothic Medium" panose="020B0603020102020204" pitchFamily="34" charset="0"/>
+              </a:rPr>
+              <a:t> </a:t>
+            </a:r>
+            <a:r>
+              <a:rPr lang="en-GB" dirty="0" err="1">
+                <a:solidFill>
+                  <a:schemeClr val="bg1"/>
+                </a:solidFill>
+                <a:latin typeface="Franklin Gothic Medium" panose="020B0603020102020204" pitchFamily="34" charset="0"/>
+              </a:rPr>
               <a:t>hij</a:t>
             </a:r>
             <a:r>
-              <a:rPr lang="en-GB" dirty="0"/>
-              <a:t> </a:t>
-            </a:r>
-            <a:r>
-              <a:rPr lang="en-GB" dirty="0" err="1"/>
+              <a:rPr lang="en-GB" dirty="0">
+                <a:solidFill>
+                  <a:schemeClr val="bg1"/>
+                </a:solidFill>
+                <a:latin typeface="Franklin Gothic Medium" panose="020B0603020102020204" pitchFamily="34" charset="0"/>
+              </a:rPr>
+              <a:t> </a:t>
+            </a:r>
+            <a:r>
+              <a:rPr lang="en-GB" dirty="0" err="1">
+                <a:solidFill>
+                  <a:schemeClr val="bg1"/>
+                </a:solidFill>
+                <a:latin typeface="Franklin Gothic Medium" panose="020B0603020102020204" pitchFamily="34" charset="0"/>
+              </a:rPr>
               <a:t>letterlijk</a:t>
             </a:r>
             <a:r>
-              <a:rPr lang="en-GB" dirty="0"/>
+              <a:rPr lang="en-GB" dirty="0">
+                <a:solidFill>
+                  <a:schemeClr val="bg1"/>
+                </a:solidFill>
+                <a:latin typeface="Franklin Gothic Medium" panose="020B0603020102020204" pitchFamily="34" charset="0"/>
+              </a:rPr>
               <a:t> de </a:t>
             </a:r>
             <a:r>
-              <a:rPr lang="en-GB" dirty="0" err="1"/>
+              <a:rPr lang="en-GB" dirty="0" err="1">
+                <a:solidFill>
+                  <a:schemeClr val="bg1"/>
+                </a:solidFill>
+                <a:latin typeface="Franklin Gothic Medium" panose="020B0603020102020204" pitchFamily="34" charset="0"/>
+              </a:rPr>
               <a:t>loopende</a:t>
             </a:r>
             <a:r>
-              <a:rPr lang="en-GB" dirty="0"/>
-              <a:t> </a:t>
-            </a:r>
-            <a:r>
-              <a:rPr lang="en-GB" dirty="0" err="1"/>
+              <a:rPr lang="en-GB" dirty="0">
+                <a:solidFill>
+                  <a:schemeClr val="bg1"/>
+                </a:solidFill>
+                <a:latin typeface="Franklin Gothic Medium" panose="020B0603020102020204" pitchFamily="34" charset="0"/>
+              </a:rPr>
+              <a:t> </a:t>
+            </a:r>
+            <a:r>
+              <a:rPr lang="en-GB" dirty="0" err="1">
+                <a:solidFill>
+                  <a:schemeClr val="bg1"/>
+                </a:solidFill>
+                <a:latin typeface="Franklin Gothic Medium" panose="020B0603020102020204" pitchFamily="34" charset="0"/>
+              </a:rPr>
               <a:t>versies</a:t>
             </a:r>
             <a:r>
-              <a:rPr lang="en-GB" dirty="0"/>
+              <a:rPr lang="en-GB" dirty="0">
+                <a:solidFill>
+                  <a:schemeClr val="bg1"/>
+                </a:solidFill>
+                <a:latin typeface="Franklin Gothic Medium" panose="020B0603020102020204" pitchFamily="34" charset="0"/>
+              </a:rPr>
               <a:t> van hem in het </a:t>
             </a:r>
             <a:r>
-              <a:rPr lang="en-GB" dirty="0" err="1"/>
+              <a:rPr lang="en-GB" dirty="0" err="1">
+                <a:solidFill>
+                  <a:schemeClr val="bg1"/>
+                </a:solidFill>
+                <a:latin typeface="Franklin Gothic Medium" panose="020B0603020102020204" pitchFamily="34" charset="0"/>
+              </a:rPr>
               <a:t>bos</a:t>
             </a:r>
             <a:r>
-              <a:rPr lang="en-GB" dirty="0"/>
+              <a:rPr lang="en-GB" dirty="0">
+                <a:solidFill>
+                  <a:schemeClr val="bg1"/>
+                </a:solidFill>
+                <a:latin typeface="Franklin Gothic Medium" panose="020B0603020102020204" pitchFamily="34" charset="0"/>
+              </a:rPr>
               <a:t>, </a:t>
             </a:r>
             <a:r>
-              <a:rPr lang="en-GB" dirty="0" err="1"/>
+              <a:rPr lang="en-GB" dirty="0" err="1">
+                <a:solidFill>
+                  <a:schemeClr val="bg1"/>
+                </a:solidFill>
+                <a:latin typeface="Franklin Gothic Medium" panose="020B0603020102020204" pitchFamily="34" charset="0"/>
+              </a:rPr>
               <a:t>dit</a:t>
             </a:r>
             <a:r>
-              <a:rPr lang="en-GB" dirty="0"/>
-              <a:t> </a:t>
-            </a:r>
-            <a:r>
-              <a:rPr lang="en-GB" dirty="0" err="1"/>
+              <a:rPr lang="en-GB" dirty="0">
+                <a:solidFill>
+                  <a:schemeClr val="bg1"/>
+                </a:solidFill>
+                <a:latin typeface="Franklin Gothic Medium" panose="020B0603020102020204" pitchFamily="34" charset="0"/>
+              </a:rPr>
+              <a:t> </a:t>
+            </a:r>
+            <a:r>
+              <a:rPr lang="en-GB" dirty="0" err="1">
+                <a:solidFill>
+                  <a:schemeClr val="bg1"/>
+                </a:solidFill>
+                <a:latin typeface="Franklin Gothic Medium" panose="020B0603020102020204" pitchFamily="34" charset="0"/>
+              </a:rPr>
               <a:t>forceert</a:t>
             </a:r>
             <a:r>
-              <a:rPr lang="en-GB" dirty="0"/>
+              <a:rPr lang="en-GB" dirty="0">
+                <a:solidFill>
+                  <a:schemeClr val="bg1"/>
+                </a:solidFill>
+                <a:latin typeface="Franklin Gothic Medium" panose="020B0603020102020204" pitchFamily="34" charset="0"/>
+              </a:rPr>
               <a:t> hem om </a:t>
             </a:r>
             <a:r>
-              <a:rPr lang="en-GB" dirty="0" err="1"/>
+              <a:rPr lang="en-GB" dirty="0" err="1">
+                <a:solidFill>
+                  <a:schemeClr val="bg1"/>
+                </a:solidFill>
+                <a:latin typeface="Franklin Gothic Medium" panose="020B0603020102020204" pitchFamily="34" charset="0"/>
+              </a:rPr>
               <a:t>zichzelf</a:t>
             </a:r>
             <a:r>
-              <a:rPr lang="en-GB" dirty="0"/>
-              <a:t> </a:t>
-            </a:r>
-            <a:r>
-              <a:rPr lang="en-GB" dirty="0" err="1"/>
+              <a:rPr lang="en-GB" dirty="0">
+                <a:solidFill>
+                  <a:schemeClr val="bg1"/>
+                </a:solidFill>
+                <a:latin typeface="Franklin Gothic Medium" panose="020B0603020102020204" pitchFamily="34" charset="0"/>
+              </a:rPr>
+              <a:t> </a:t>
+            </a:r>
+            <a:r>
+              <a:rPr lang="en-GB" dirty="0" err="1">
+                <a:solidFill>
+                  <a:schemeClr val="bg1"/>
+                </a:solidFill>
+                <a:latin typeface="Franklin Gothic Medium" panose="020B0603020102020204" pitchFamily="34" charset="0"/>
+              </a:rPr>
               <a:t>te</a:t>
             </a:r>
             <a:r>
-              <a:rPr lang="en-GB" dirty="0"/>
-              <a:t> </a:t>
-            </a:r>
-            <a:r>
-              <a:rPr lang="en-GB" dirty="0" err="1"/>
+              <a:rPr lang="en-GB" dirty="0">
+                <a:solidFill>
+                  <a:schemeClr val="bg1"/>
+                </a:solidFill>
+                <a:latin typeface="Franklin Gothic Medium" panose="020B0603020102020204" pitchFamily="34" charset="0"/>
+              </a:rPr>
+              <a:t> </a:t>
+            </a:r>
+            <a:r>
+              <a:rPr lang="en-GB" dirty="0" err="1">
+                <a:solidFill>
+                  <a:schemeClr val="bg1"/>
+                </a:solidFill>
+                <a:latin typeface="Franklin Gothic Medium" panose="020B0603020102020204" pitchFamily="34" charset="0"/>
+              </a:rPr>
               <a:t>confronteren</a:t>
             </a:r>
             <a:r>
-              <a:rPr lang="en-GB" dirty="0"/>
-              <a:t>, </a:t>
-            </a:r>
-            <a:r>
-              <a:rPr lang="en-GB" dirty="0" err="1"/>
-              <a:t>zijn</a:t>
-            </a:r>
-            <a:r>
-              <a:rPr lang="en-GB" dirty="0"/>
-              <a:t> </a:t>
-            </a:r>
-            <a:r>
-              <a:rPr lang="en-GB" dirty="0" err="1"/>
-              <a:t>acties</a:t>
-            </a:r>
-            <a:r>
-              <a:rPr lang="en-GB" dirty="0"/>
-              <a:t> </a:t>
-            </a:r>
-            <a:r>
-              <a:rPr lang="en-GB" dirty="0" err="1"/>
+              <a:rPr lang="en-GB" dirty="0">
+                <a:solidFill>
+                  <a:schemeClr val="bg1"/>
+                </a:solidFill>
+                <a:latin typeface="Franklin Gothic Medium" panose="020B0603020102020204" pitchFamily="34" charset="0"/>
+              </a:rPr>
+              <a:t>, zijn acties </a:t>
+            </a:r>
+            <a:r>
+              <a:rPr lang="en-GB" dirty="0" err="1">
+                <a:solidFill>
+                  <a:schemeClr val="bg1"/>
+                </a:solidFill>
+                <a:latin typeface="Franklin Gothic Medium" panose="020B0603020102020204" pitchFamily="34" charset="0"/>
+              </a:rPr>
               <a:t>te</a:t>
             </a:r>
             <a:r>
-              <a:rPr lang="en-GB" dirty="0"/>
-              <a:t> </a:t>
-            </a:r>
-            <a:r>
-              <a:rPr lang="en-GB" dirty="0" err="1"/>
+              <a:rPr lang="en-GB" dirty="0">
+                <a:solidFill>
+                  <a:schemeClr val="bg1"/>
+                </a:solidFill>
+                <a:latin typeface="Franklin Gothic Medium" panose="020B0603020102020204" pitchFamily="34" charset="0"/>
+              </a:rPr>
+              <a:t> </a:t>
+            </a:r>
+            <a:r>
+              <a:rPr lang="en-GB" dirty="0" err="1">
+                <a:solidFill>
+                  <a:schemeClr val="bg1"/>
+                </a:solidFill>
+                <a:latin typeface="Franklin Gothic Medium" panose="020B0603020102020204" pitchFamily="34" charset="0"/>
+              </a:rPr>
               <a:t>zien</a:t>
             </a:r>
             <a:r>
-              <a:rPr lang="en-GB" dirty="0"/>
+              <a:rPr lang="en-GB" dirty="0">
+                <a:solidFill>
+                  <a:schemeClr val="bg1"/>
+                </a:solidFill>
+                <a:latin typeface="Franklin Gothic Medium" panose="020B0603020102020204" pitchFamily="34" charset="0"/>
+              </a:rPr>
               <a:t> en </a:t>
             </a:r>
             <a:r>
-              <a:rPr lang="en-GB" dirty="0" err="1"/>
+              <a:rPr lang="en-GB" dirty="0" err="1">
+                <a:solidFill>
+                  <a:schemeClr val="bg1"/>
+                </a:solidFill>
+                <a:latin typeface="Franklin Gothic Medium" panose="020B0603020102020204" pitchFamily="34" charset="0"/>
+              </a:rPr>
               <a:t>hierdoor</a:t>
             </a:r>
             <a:r>
-              <a:rPr lang="en-GB" dirty="0"/>
-              <a:t> </a:t>
-            </a:r>
-            <a:r>
-              <a:rPr lang="en-GB" dirty="0" err="1"/>
+              <a:rPr lang="en-GB" dirty="0">
+                <a:solidFill>
+                  <a:schemeClr val="bg1"/>
+                </a:solidFill>
+                <a:latin typeface="Franklin Gothic Medium" panose="020B0603020102020204" pitchFamily="34" charset="0"/>
+              </a:rPr>
+              <a:t> </a:t>
+            </a:r>
+            <a:r>
+              <a:rPr lang="en-GB" dirty="0" err="1">
+                <a:solidFill>
+                  <a:schemeClr val="bg1"/>
+                </a:solidFill>
+                <a:latin typeface="Franklin Gothic Medium" panose="020B0603020102020204" pitchFamily="34" charset="0"/>
+              </a:rPr>
               <a:t>bevrijding</a:t>
             </a:r>
             <a:r>
-              <a:rPr lang="en-GB" dirty="0"/>
-              <a:t> </a:t>
-            </a:r>
-            <a:r>
-              <a:rPr lang="en-GB" dirty="0" err="1"/>
+              <a:rPr lang="en-GB" dirty="0">
+                <a:solidFill>
+                  <a:schemeClr val="bg1"/>
+                </a:solidFill>
+                <a:latin typeface="Franklin Gothic Medium" panose="020B0603020102020204" pitchFamily="34" charset="0"/>
+              </a:rPr>
+              <a:t> </a:t>
+            </a:r>
+            <a:r>
+              <a:rPr lang="en-GB" dirty="0" err="1">
+                <a:solidFill>
+                  <a:schemeClr val="bg1"/>
+                </a:solidFill>
+                <a:latin typeface="Franklin Gothic Medium" panose="020B0603020102020204" pitchFamily="34" charset="0"/>
+              </a:rPr>
               <a:t>te</a:t>
             </a:r>
             <a:r>
-              <a:rPr lang="en-GB" dirty="0"/>
-              <a:t> </a:t>
-            </a:r>
-            <a:r>
-              <a:rPr lang="en-GB" dirty="0" err="1"/>
+              <a:rPr lang="en-GB" dirty="0">
+                <a:solidFill>
+                  <a:schemeClr val="bg1"/>
+                </a:solidFill>
+                <a:latin typeface="Franklin Gothic Medium" panose="020B0603020102020204" pitchFamily="34" charset="0"/>
+              </a:rPr>
+              <a:t> </a:t>
+            </a:r>
+            <a:r>
+              <a:rPr lang="en-GB" dirty="0" err="1">
+                <a:solidFill>
+                  <a:schemeClr val="bg1"/>
+                </a:solidFill>
+                <a:latin typeface="Franklin Gothic Medium" panose="020B0603020102020204" pitchFamily="34" charset="0"/>
+              </a:rPr>
               <a:t>zoeken</a:t>
             </a:r>
             <a:r>
-              <a:rPr lang="en-GB" dirty="0"/>
+              <a:rPr lang="en-GB" dirty="0">
+                <a:solidFill>
+                  <a:schemeClr val="bg1"/>
+                </a:solidFill>
+                <a:latin typeface="Franklin Gothic Medium" panose="020B0603020102020204" pitchFamily="34" charset="0"/>
+              </a:rPr>
               <a:t>.</a:t>
             </a:r>
-            <a:endParaRPr lang="nl-BE" dirty="0"/>
+            <a:endParaRPr lang="nl-BE" dirty="0">
+              <a:solidFill>
+                <a:schemeClr val="bg1"/>
+              </a:solidFill>
+              <a:latin typeface="Franklin Gothic Medium" panose="020B0603020102020204" pitchFamily="34" charset="0"/>
+            </a:endParaRPr>
           </a:p>
         </p:txBody>
       </p:sp>
@@ -4960,7 +5951,7 @@
         </p:spPr>
         <p:txBody>
           <a:bodyPr>
-            <a:normAutofit fontScale="92500" lnSpcReduction="20000"/>
+            <a:normAutofit fontScale="92500" lnSpcReduction="10000"/>
           </a:bodyPr>
           <a:lstStyle/>
           <a:p>
@@ -4968,30 +5959,65 @@
               <a:buNone/>
             </a:pPr>
             <a:r>
-              <a:rPr lang="en-GB" dirty="0" err="1"/>
+              <a:rPr lang="en-GB" dirty="0" err="1">
+                <a:solidFill>
+                  <a:schemeClr val="bg1"/>
+                </a:solidFill>
+                <a:latin typeface="Franklin Gothic Medium" panose="020B0603020102020204" pitchFamily="34" charset="0"/>
+              </a:rPr>
               <a:t>Waar</a:t>
             </a:r>
             <a:r>
-              <a:rPr lang="en-GB" dirty="0"/>
-              <a:t> </a:t>
-            </a:r>
-            <a:r>
-              <a:rPr lang="en-GB" dirty="0" err="1"/>
+              <a:rPr lang="en-GB" dirty="0">
+                <a:solidFill>
+                  <a:schemeClr val="bg1"/>
+                </a:solidFill>
+                <a:latin typeface="Franklin Gothic Medium" panose="020B0603020102020204" pitchFamily="34" charset="0"/>
+              </a:rPr>
+              <a:t> </a:t>
+            </a:r>
+            <a:r>
+              <a:rPr lang="en-GB" dirty="0" err="1">
+                <a:solidFill>
+                  <a:schemeClr val="bg1"/>
+                </a:solidFill>
+                <a:latin typeface="Franklin Gothic Medium" panose="020B0603020102020204" pitchFamily="34" charset="0"/>
+              </a:rPr>
               <a:t>rond</a:t>
             </a:r>
             <a:r>
-              <a:rPr lang="en-GB" dirty="0"/>
-              <a:t> </a:t>
-            </a:r>
-            <a:r>
-              <a:rPr lang="en-GB" dirty="0" err="1"/>
+              <a:rPr lang="en-GB" dirty="0">
+                <a:solidFill>
+                  <a:schemeClr val="bg1"/>
+                </a:solidFill>
+                <a:latin typeface="Franklin Gothic Medium" panose="020B0603020102020204" pitchFamily="34" charset="0"/>
+              </a:rPr>
+              <a:t> </a:t>
+            </a:r>
+            <a:r>
+              <a:rPr lang="en-GB" dirty="0" err="1">
+                <a:solidFill>
+                  <a:schemeClr val="bg1"/>
+                </a:solidFill>
+                <a:latin typeface="Franklin Gothic Medium" panose="020B0603020102020204" pitchFamily="34" charset="0"/>
+              </a:rPr>
               <a:t>draait</a:t>
             </a:r>
             <a:r>
-              <a:rPr lang="en-GB" dirty="0"/>
+              <a:rPr lang="en-GB" dirty="0">
+                <a:solidFill>
+                  <a:schemeClr val="bg1"/>
+                </a:solidFill>
+                <a:latin typeface="Franklin Gothic Medium" panose="020B0603020102020204" pitchFamily="34" charset="0"/>
+              </a:rPr>
               <a:t> de video?</a:t>
             </a:r>
-            <a:endParaRPr lang="nl-BE" dirty="0"/>
+            <a:endParaRPr lang="nl-BE" dirty="0">
+              <a:solidFill>
+                <a:schemeClr val="bg1"/>
+              </a:solidFill>
+              <a:latin typeface="Franklin Gothic Medium" panose="020B0603020102020204" pitchFamily="34" charset="0"/>
+            </a:endParaRPr>
           </a:p>
         </p:txBody>
       </p:sp>
@@ -5011,6 +6037,14 @@
 <file path=ppt/slides/slide6.xml><?xml version="1.0" encoding="utf-8"?>
 <p:sld xmlns:a="http://schemas.openxmlformats.org/drawingml/2006/main" xmlns:r="http://schemas.openxmlformats.org/officeDocument/2006/relationships" xmlns:p="http://schemas.openxmlformats.org/presentationml/2006/main">
   <p:cSld>
+    <p:bg>
+      <p:bgPr>
+        <a:solidFill>
+          <a:schemeClr val="tx1"/>
+        </a:solidFill>
+        <a:effectLst/>
+      </p:bgPr>
+    </p:bg>
     <p:spTree>
       <p:nvGrpSpPr>
         <p:cNvPr id="1" name="">
@@ -5060,345 +6094,775 @@
           <a:lstStyle/>
           <a:p>
             <a:r>
-              <a:rPr lang="en-GB" b="1" dirty="0" err="1"/>
+              <a:rPr lang="en-GB" b="1" dirty="0" err="1">
+                <a:solidFill>
+                  <a:schemeClr val="bg1"/>
+                </a:solidFill>
+                <a:latin typeface="Franklin Gothic Medium" panose="020B0603020102020204" pitchFamily="34" charset="0"/>
+              </a:rPr>
               <a:t>Handschoenen</a:t>
             </a:r>
             <a:br>
-              <a:rPr lang="en-GB" b="1" dirty="0"/>
+              <a:rPr lang="en-GB" b="1" dirty="0">
+                <a:solidFill>
+                  <a:schemeClr val="bg1"/>
+                </a:solidFill>
+                <a:latin typeface="Franklin Gothic Medium" panose="020B0603020102020204" pitchFamily="34" charset="0"/>
+              </a:rPr>
             </a:br>
             <a:r>
-              <a:rPr lang="en-GB" dirty="0"/>
+              <a:rPr lang="en-GB" dirty="0">
+                <a:solidFill>
+                  <a:schemeClr val="bg1"/>
+                </a:solidFill>
+                <a:latin typeface="Franklin Gothic Medium" panose="020B0603020102020204" pitchFamily="34" charset="0"/>
+              </a:rPr>
               <a:t>Het personage </a:t>
             </a:r>
             <a:r>
-              <a:rPr lang="en-GB" dirty="0" err="1"/>
+              <a:rPr lang="en-GB" dirty="0" err="1">
+                <a:solidFill>
+                  <a:schemeClr val="bg1"/>
+                </a:solidFill>
+                <a:latin typeface="Franklin Gothic Medium" panose="020B0603020102020204" pitchFamily="34" charset="0"/>
+              </a:rPr>
               <a:t>onderzoekt</a:t>
             </a:r>
             <a:r>
-              <a:rPr lang="en-GB" dirty="0"/>
-              <a:t> </a:t>
-            </a:r>
-            <a:r>
-              <a:rPr lang="en-GB" dirty="0" err="1"/>
+              <a:rPr lang="en-GB" dirty="0">
+                <a:solidFill>
+                  <a:schemeClr val="bg1"/>
+                </a:solidFill>
+                <a:latin typeface="Franklin Gothic Medium" panose="020B0603020102020204" pitchFamily="34" charset="0"/>
+              </a:rPr>
+              <a:t> </a:t>
+            </a:r>
+            <a:r>
+              <a:rPr lang="en-GB" dirty="0" err="1">
+                <a:solidFill>
+                  <a:schemeClr val="bg1"/>
+                </a:solidFill>
+                <a:latin typeface="Franklin Gothic Medium" panose="020B0603020102020204" pitchFamily="34" charset="0"/>
+              </a:rPr>
               <a:t>waar</a:t>
             </a:r>
             <a:r>
-              <a:rPr lang="en-GB" dirty="0"/>
+              <a:rPr lang="en-GB" dirty="0">
+                <a:solidFill>
+                  <a:schemeClr val="bg1"/>
+                </a:solidFill>
+                <a:latin typeface="Franklin Gothic Medium" panose="020B0603020102020204" pitchFamily="34" charset="0"/>
+              </a:rPr>
               <a:t> de loop van het </a:t>
             </a:r>
             <a:r>
-              <a:rPr lang="en-GB" dirty="0" err="1"/>
+              <a:rPr lang="en-GB" dirty="0" err="1">
+                <a:solidFill>
+                  <a:schemeClr val="bg1"/>
+                </a:solidFill>
+                <a:latin typeface="Franklin Gothic Medium" panose="020B0603020102020204" pitchFamily="34" charset="0"/>
+              </a:rPr>
               <a:t>bos</a:t>
             </a:r>
             <a:r>
-              <a:rPr lang="en-GB" dirty="0"/>
-              <a:t> </a:t>
-            </a:r>
-            <a:r>
-              <a:rPr lang="en-GB" dirty="0" err="1"/>
+              <a:rPr lang="en-GB" dirty="0">
+                <a:solidFill>
+                  <a:schemeClr val="bg1"/>
+                </a:solidFill>
+                <a:latin typeface="Franklin Gothic Medium" panose="020B0603020102020204" pitchFamily="34" charset="0"/>
+              </a:rPr>
+              <a:t> </a:t>
+            </a:r>
+            <a:r>
+              <a:rPr lang="en-GB" dirty="0" err="1">
+                <a:solidFill>
+                  <a:schemeClr val="bg1"/>
+                </a:solidFill>
+                <a:latin typeface="Franklin Gothic Medium" panose="020B0603020102020204" pitchFamily="34" charset="0"/>
+              </a:rPr>
               <a:t>begint</a:t>
             </a:r>
             <a:r>
-              <a:rPr lang="en-GB" dirty="0"/>
+              <a:rPr lang="en-GB" dirty="0">
+                <a:solidFill>
+                  <a:schemeClr val="bg1"/>
+                </a:solidFill>
+                <a:latin typeface="Franklin Gothic Medium" panose="020B0603020102020204" pitchFamily="34" charset="0"/>
+              </a:rPr>
               <a:t> en </a:t>
             </a:r>
             <a:r>
-              <a:rPr lang="en-GB" dirty="0" err="1"/>
+              <a:rPr lang="en-GB" dirty="0" err="1">
+                <a:solidFill>
+                  <a:schemeClr val="bg1"/>
+                </a:solidFill>
+                <a:latin typeface="Franklin Gothic Medium" panose="020B0603020102020204" pitchFamily="34" charset="0"/>
+              </a:rPr>
               <a:t>eindigt</a:t>
             </a:r>
             <a:r>
-              <a:rPr lang="en-GB" dirty="0"/>
+              <a:rPr lang="en-GB" dirty="0">
+                <a:solidFill>
+                  <a:schemeClr val="bg1"/>
+                </a:solidFill>
+                <a:latin typeface="Franklin Gothic Medium" panose="020B0603020102020204" pitchFamily="34" charset="0"/>
+              </a:rPr>
               <a:t>, </a:t>
             </a:r>
             <a:r>
-              <a:rPr lang="en-GB" dirty="0" err="1"/>
+              <a:rPr lang="en-GB" dirty="0" err="1">
+                <a:solidFill>
+                  <a:schemeClr val="bg1"/>
+                </a:solidFill>
+                <a:latin typeface="Franklin Gothic Medium" panose="020B0603020102020204" pitchFamily="34" charset="0"/>
+              </a:rPr>
               <a:t>daarom</a:t>
             </a:r>
             <a:r>
-              <a:rPr lang="en-GB" dirty="0"/>
-              <a:t> </a:t>
-            </a:r>
-            <a:r>
-              <a:rPr lang="en-GB" dirty="0" err="1"/>
+              <a:rPr lang="en-GB" dirty="0">
+                <a:solidFill>
+                  <a:schemeClr val="bg1"/>
+                </a:solidFill>
+                <a:latin typeface="Franklin Gothic Medium" panose="020B0603020102020204" pitchFamily="34" charset="0"/>
+              </a:rPr>
+              <a:t> </a:t>
+            </a:r>
+            <a:r>
+              <a:rPr lang="en-GB" dirty="0" err="1">
+                <a:solidFill>
+                  <a:schemeClr val="bg1"/>
+                </a:solidFill>
+                <a:latin typeface="Franklin Gothic Medium" panose="020B0603020102020204" pitchFamily="34" charset="0"/>
+              </a:rPr>
               <a:t>gebruikt</a:t>
             </a:r>
             <a:r>
-              <a:rPr lang="en-GB" dirty="0"/>
-              <a:t> </a:t>
-            </a:r>
-            <a:r>
-              <a:rPr lang="en-GB" dirty="0" err="1"/>
+              <a:rPr lang="en-GB" dirty="0">
+                <a:solidFill>
+                  <a:schemeClr val="bg1"/>
+                </a:solidFill>
+                <a:latin typeface="Franklin Gothic Medium" panose="020B0603020102020204" pitchFamily="34" charset="0"/>
+              </a:rPr>
+              <a:t> </a:t>
+            </a:r>
+            <a:r>
+              <a:rPr lang="en-GB" dirty="0" err="1">
+                <a:solidFill>
+                  <a:schemeClr val="bg1"/>
+                </a:solidFill>
+                <a:latin typeface="Franklin Gothic Medium" panose="020B0603020102020204" pitchFamily="34" charset="0"/>
+              </a:rPr>
               <a:t>hij</a:t>
             </a:r>
             <a:r>
-              <a:rPr lang="en-GB" dirty="0"/>
-              <a:t> </a:t>
-            </a:r>
-            <a:r>
-              <a:rPr lang="en-GB" dirty="0" err="1"/>
+              <a:rPr lang="en-GB" dirty="0">
+                <a:solidFill>
+                  <a:schemeClr val="bg1"/>
+                </a:solidFill>
+                <a:latin typeface="Franklin Gothic Medium" panose="020B0603020102020204" pitchFamily="34" charset="0"/>
+              </a:rPr>
+              <a:t> </a:t>
+            </a:r>
+            <a:r>
+              <a:rPr lang="en-GB" dirty="0" err="1">
+                <a:solidFill>
+                  <a:schemeClr val="bg1"/>
+                </a:solidFill>
+                <a:latin typeface="Franklin Gothic Medium" panose="020B0603020102020204" pitchFamily="34" charset="0"/>
+              </a:rPr>
               <a:t>zijn</a:t>
             </a:r>
             <a:r>
-              <a:rPr lang="en-GB" dirty="0"/>
-              <a:t> </a:t>
-            </a:r>
-            <a:r>
-              <a:rPr lang="en-GB" dirty="0" err="1"/>
+              <a:rPr lang="en-GB" dirty="0">
+                <a:solidFill>
+                  <a:schemeClr val="bg1"/>
+                </a:solidFill>
+                <a:latin typeface="Franklin Gothic Medium" panose="020B0603020102020204" pitchFamily="34" charset="0"/>
+              </a:rPr>
+              <a:t> </a:t>
+            </a:r>
+            <a:r>
+              <a:rPr lang="en-GB" dirty="0" err="1">
+                <a:solidFill>
+                  <a:schemeClr val="bg1"/>
+                </a:solidFill>
+                <a:latin typeface="Franklin Gothic Medium" panose="020B0603020102020204" pitchFamily="34" charset="0"/>
+              </a:rPr>
               <a:t>handschoenen</a:t>
             </a:r>
             <a:r>
-              <a:rPr lang="en-GB" dirty="0"/>
+              <a:rPr lang="en-GB" dirty="0">
+                <a:solidFill>
+                  <a:schemeClr val="bg1"/>
+                </a:solidFill>
+                <a:latin typeface="Franklin Gothic Medium" panose="020B0603020102020204" pitchFamily="34" charset="0"/>
+              </a:rPr>
               <a:t> als </a:t>
             </a:r>
             <a:r>
-              <a:rPr lang="en-GB" dirty="0" err="1"/>
+              <a:rPr lang="en-GB" dirty="0" err="1">
+                <a:solidFill>
+                  <a:schemeClr val="bg1"/>
+                </a:solidFill>
+                <a:latin typeface="Franklin Gothic Medium" panose="020B0603020102020204" pitchFamily="34" charset="0"/>
+              </a:rPr>
               <a:t>markering</a:t>
             </a:r>
             <a:r>
-              <a:rPr lang="en-GB" dirty="0"/>
+              <a:rPr lang="en-GB" dirty="0">
+                <a:solidFill>
+                  <a:schemeClr val="bg1"/>
+                </a:solidFill>
+                <a:latin typeface="Franklin Gothic Medium" panose="020B0603020102020204" pitchFamily="34" charset="0"/>
+              </a:rPr>
               <a:t> van </a:t>
             </a:r>
             <a:r>
-              <a:rPr lang="en-GB" dirty="0" err="1"/>
+              <a:rPr lang="en-GB" dirty="0" err="1">
+                <a:solidFill>
+                  <a:schemeClr val="bg1"/>
+                </a:solidFill>
+                <a:latin typeface="Franklin Gothic Medium" panose="020B0603020102020204" pitchFamily="34" charset="0"/>
+              </a:rPr>
               <a:t>een</a:t>
             </a:r>
             <a:r>
-              <a:rPr lang="en-GB" dirty="0"/>
-              <a:t> </a:t>
-            </a:r>
-            <a:r>
-              <a:rPr lang="en-GB" dirty="0" err="1"/>
+              <a:rPr lang="en-GB" dirty="0">
+                <a:solidFill>
+                  <a:schemeClr val="bg1"/>
+                </a:solidFill>
+                <a:latin typeface="Franklin Gothic Medium" panose="020B0603020102020204" pitchFamily="34" charset="0"/>
+              </a:rPr>
+              <a:t> </a:t>
+            </a:r>
+            <a:r>
+              <a:rPr lang="en-GB" dirty="0" err="1">
+                <a:solidFill>
+                  <a:schemeClr val="bg1"/>
+                </a:solidFill>
+                <a:latin typeface="Franklin Gothic Medium" panose="020B0603020102020204" pitchFamily="34" charset="0"/>
+              </a:rPr>
               <a:t>plek</a:t>
             </a:r>
             <a:r>
-              <a:rPr lang="en-GB" dirty="0"/>
+              <a:rPr lang="en-GB" dirty="0">
+                <a:solidFill>
+                  <a:schemeClr val="bg1"/>
+                </a:solidFill>
+                <a:latin typeface="Franklin Gothic Medium" panose="020B0603020102020204" pitchFamily="34" charset="0"/>
+              </a:rPr>
               <a:t> die </a:t>
             </a:r>
             <a:r>
-              <a:rPr lang="en-GB" dirty="0" err="1"/>
+              <a:rPr lang="en-GB" dirty="0" err="1">
+                <a:solidFill>
+                  <a:schemeClr val="bg1"/>
+                </a:solidFill>
+                <a:latin typeface="Franklin Gothic Medium" panose="020B0603020102020204" pitchFamily="34" charset="0"/>
+              </a:rPr>
               <a:t>hij</a:t>
             </a:r>
             <a:r>
-              <a:rPr lang="en-GB" dirty="0"/>
-              <a:t> </a:t>
-            </a:r>
-            <a:r>
-              <a:rPr lang="en-GB" dirty="0" err="1"/>
+              <a:rPr lang="en-GB" dirty="0">
+                <a:solidFill>
+                  <a:schemeClr val="bg1"/>
+                </a:solidFill>
+                <a:latin typeface="Franklin Gothic Medium" panose="020B0603020102020204" pitchFamily="34" charset="0"/>
+              </a:rPr>
+              <a:t> </a:t>
+            </a:r>
+            <a:r>
+              <a:rPr lang="en-GB" dirty="0" err="1">
+                <a:solidFill>
+                  <a:schemeClr val="bg1"/>
+                </a:solidFill>
+                <a:latin typeface="Franklin Gothic Medium" panose="020B0603020102020204" pitchFamily="34" charset="0"/>
+              </a:rPr>
               <a:t>kan</a:t>
             </a:r>
             <a:r>
-              <a:rPr lang="en-GB" dirty="0"/>
-              <a:t> </a:t>
-            </a:r>
-            <a:r>
-              <a:rPr lang="en-GB" dirty="0" err="1"/>
+              <a:rPr lang="en-GB" dirty="0">
+                <a:solidFill>
+                  <a:schemeClr val="bg1"/>
+                </a:solidFill>
+                <a:latin typeface="Franklin Gothic Medium" panose="020B0603020102020204" pitchFamily="34" charset="0"/>
+              </a:rPr>
+              <a:t> </a:t>
+            </a:r>
+            <a:r>
+              <a:rPr lang="en-GB" dirty="0" err="1">
+                <a:solidFill>
+                  <a:schemeClr val="bg1"/>
+                </a:solidFill>
+                <a:latin typeface="Franklin Gothic Medium" panose="020B0603020102020204" pitchFamily="34" charset="0"/>
+              </a:rPr>
               <a:t>volgen</a:t>
             </a:r>
             <a:r>
-              <a:rPr lang="en-GB" dirty="0"/>
+              <a:rPr lang="en-GB" dirty="0">
+                <a:solidFill>
+                  <a:schemeClr val="bg1"/>
+                </a:solidFill>
+                <a:latin typeface="Franklin Gothic Medium" panose="020B0603020102020204" pitchFamily="34" charset="0"/>
+              </a:rPr>
               <a:t>, die </a:t>
             </a:r>
             <a:r>
-              <a:rPr lang="en-GB" dirty="0" err="1"/>
+              <a:rPr lang="en-GB" dirty="0" err="1">
+                <a:solidFill>
+                  <a:schemeClr val="bg1"/>
+                </a:solidFill>
+                <a:latin typeface="Franklin Gothic Medium" panose="020B0603020102020204" pitchFamily="34" charset="0"/>
+              </a:rPr>
               <a:t>handschoenen</a:t>
             </a:r>
             <a:r>
-              <a:rPr lang="en-GB" dirty="0"/>
-              <a:t> </a:t>
-            </a:r>
-            <a:r>
-              <a:rPr lang="en-GB" dirty="0" err="1"/>
+              <a:rPr lang="en-GB" dirty="0">
+                <a:solidFill>
+                  <a:schemeClr val="bg1"/>
+                </a:solidFill>
+                <a:latin typeface="Franklin Gothic Medium" panose="020B0603020102020204" pitchFamily="34" charset="0"/>
+              </a:rPr>
+              <a:t> </a:t>
+            </a:r>
+            <a:r>
+              <a:rPr lang="en-GB" dirty="0" err="1">
+                <a:solidFill>
+                  <a:schemeClr val="bg1"/>
+                </a:solidFill>
+                <a:latin typeface="Franklin Gothic Medium" panose="020B0603020102020204" pitchFamily="34" charset="0"/>
+              </a:rPr>
               <a:t>vindt</a:t>
             </a:r>
             <a:r>
-              <a:rPr lang="en-GB" dirty="0"/>
-              <a:t> </a:t>
-            </a:r>
-            <a:r>
-              <a:rPr lang="en-GB" dirty="0" err="1"/>
+              <a:rPr lang="en-GB" dirty="0">
+                <a:solidFill>
+                  <a:schemeClr val="bg1"/>
+                </a:solidFill>
+                <a:latin typeface="Franklin Gothic Medium" panose="020B0603020102020204" pitchFamily="34" charset="0"/>
+              </a:rPr>
+              <a:t> </a:t>
+            </a:r>
+            <a:r>
+              <a:rPr lang="en-GB" dirty="0" err="1">
+                <a:solidFill>
+                  <a:schemeClr val="bg1"/>
+                </a:solidFill>
+                <a:latin typeface="Franklin Gothic Medium" panose="020B0603020102020204" pitchFamily="34" charset="0"/>
+              </a:rPr>
               <a:t>hij</a:t>
             </a:r>
             <a:r>
-              <a:rPr lang="en-GB" dirty="0"/>
-              <a:t> </a:t>
-            </a:r>
-            <a:r>
-              <a:rPr lang="en-GB" dirty="0" err="1"/>
+              <a:rPr lang="en-GB" dirty="0">
+                <a:solidFill>
+                  <a:schemeClr val="bg1"/>
+                </a:solidFill>
+                <a:latin typeface="Franklin Gothic Medium" panose="020B0603020102020204" pitchFamily="34" charset="0"/>
+              </a:rPr>
+              <a:t> </a:t>
+            </a:r>
+            <a:r>
+              <a:rPr lang="en-GB" dirty="0" err="1">
+                <a:solidFill>
+                  <a:schemeClr val="bg1"/>
+                </a:solidFill>
+                <a:latin typeface="Franklin Gothic Medium" panose="020B0603020102020204" pitchFamily="34" charset="0"/>
+              </a:rPr>
               <a:t>keer</a:t>
             </a:r>
             <a:r>
-              <a:rPr lang="en-GB" dirty="0"/>
+              <a:rPr lang="en-GB" dirty="0">
+                <a:solidFill>
+                  <a:schemeClr val="bg1"/>
+                </a:solidFill>
+                <a:latin typeface="Franklin Gothic Medium" panose="020B0603020102020204" pitchFamily="34" charset="0"/>
+              </a:rPr>
               <a:t> op </a:t>
             </a:r>
             <a:r>
-              <a:rPr lang="en-GB" dirty="0" err="1"/>
+              <a:rPr lang="en-GB" dirty="0" err="1">
+                <a:solidFill>
+                  <a:schemeClr val="bg1"/>
+                </a:solidFill>
+                <a:latin typeface="Franklin Gothic Medium" panose="020B0603020102020204" pitchFamily="34" charset="0"/>
+              </a:rPr>
               <a:t>keer</a:t>
             </a:r>
             <a:r>
-              <a:rPr lang="en-GB" dirty="0"/>
-              <a:t> </a:t>
-            </a:r>
-            <a:r>
-              <a:rPr lang="en-GB" dirty="0" err="1"/>
+              <a:rPr lang="en-GB" dirty="0">
+                <a:solidFill>
+                  <a:schemeClr val="bg1"/>
+                </a:solidFill>
+                <a:latin typeface="Franklin Gothic Medium" panose="020B0603020102020204" pitchFamily="34" charset="0"/>
+              </a:rPr>
+              <a:t> </a:t>
+            </a:r>
+            <a:r>
+              <a:rPr lang="en-GB" dirty="0" err="1">
+                <a:solidFill>
+                  <a:schemeClr val="bg1"/>
+                </a:solidFill>
+                <a:latin typeface="Franklin Gothic Medium" panose="020B0603020102020204" pitchFamily="34" charset="0"/>
+              </a:rPr>
               <a:t>terug</a:t>
             </a:r>
             <a:r>
-              <a:rPr lang="en-GB" dirty="0"/>
+              <a:rPr lang="en-GB" dirty="0">
+                <a:solidFill>
+                  <a:schemeClr val="bg1"/>
+                </a:solidFill>
+                <a:latin typeface="Franklin Gothic Medium" panose="020B0603020102020204" pitchFamily="34" charset="0"/>
+              </a:rPr>
               <a:t> als </a:t>
             </a:r>
             <a:r>
-              <a:rPr lang="en-GB" dirty="0" err="1"/>
+              <a:rPr lang="en-GB" dirty="0" err="1">
+                <a:solidFill>
+                  <a:schemeClr val="bg1"/>
+                </a:solidFill>
+                <a:latin typeface="Franklin Gothic Medium" panose="020B0603020102020204" pitchFamily="34" charset="0"/>
+              </a:rPr>
               <a:t>hij</a:t>
             </a:r>
             <a:r>
-              <a:rPr lang="en-GB" dirty="0"/>
-              <a:t> </a:t>
-            </a:r>
-            <a:r>
-              <a:rPr lang="en-GB" dirty="0" err="1"/>
+              <a:rPr lang="en-GB" dirty="0">
+                <a:solidFill>
+                  <a:schemeClr val="bg1"/>
+                </a:solidFill>
+                <a:latin typeface="Franklin Gothic Medium" panose="020B0603020102020204" pitchFamily="34" charset="0"/>
+              </a:rPr>
+              <a:t> </a:t>
+            </a:r>
+            <a:r>
+              <a:rPr lang="en-GB" dirty="0" err="1">
+                <a:solidFill>
+                  <a:schemeClr val="bg1"/>
+                </a:solidFill>
+                <a:latin typeface="Franklin Gothic Medium" panose="020B0603020102020204" pitchFamily="34" charset="0"/>
+              </a:rPr>
               <a:t>verder</a:t>
             </a:r>
             <a:r>
-              <a:rPr lang="en-GB" dirty="0"/>
+              <a:rPr lang="en-GB" dirty="0">
+                <a:solidFill>
+                  <a:schemeClr val="bg1"/>
+                </a:solidFill>
+                <a:latin typeface="Franklin Gothic Medium" panose="020B0603020102020204" pitchFamily="34" charset="0"/>
+              </a:rPr>
               <a:t> in de loop </a:t>
             </a:r>
             <a:r>
-              <a:rPr lang="en-GB" dirty="0" err="1"/>
+              <a:rPr lang="en-GB" dirty="0" err="1">
+                <a:solidFill>
+                  <a:schemeClr val="bg1"/>
+                </a:solidFill>
+                <a:latin typeface="Franklin Gothic Medium" panose="020B0603020102020204" pitchFamily="34" charset="0"/>
+              </a:rPr>
               <a:t>stapt</a:t>
             </a:r>
             <a:r>
-              <a:rPr lang="en-GB" dirty="0"/>
+              <a:rPr lang="en-GB" dirty="0">
+                <a:solidFill>
+                  <a:schemeClr val="bg1"/>
+                </a:solidFill>
+                <a:latin typeface="Franklin Gothic Medium" panose="020B0603020102020204" pitchFamily="34" charset="0"/>
+              </a:rPr>
               <a:t>, maar </a:t>
             </a:r>
             <a:r>
-              <a:rPr lang="en-GB" dirty="0" err="1"/>
+              <a:rPr lang="en-GB" dirty="0" err="1">
+                <a:solidFill>
+                  <a:schemeClr val="bg1"/>
+                </a:solidFill>
+                <a:latin typeface="Franklin Gothic Medium" panose="020B0603020102020204" pitchFamily="34" charset="0"/>
+              </a:rPr>
               <a:t>zijn</a:t>
             </a:r>
             <a:r>
-              <a:rPr lang="en-GB" dirty="0"/>
-              <a:t> </a:t>
-            </a:r>
-            <a:r>
-              <a:rPr lang="en-GB" dirty="0" err="1"/>
+              <a:rPr lang="en-GB" dirty="0">
+                <a:solidFill>
+                  <a:schemeClr val="bg1"/>
+                </a:solidFill>
+                <a:latin typeface="Franklin Gothic Medium" panose="020B0603020102020204" pitchFamily="34" charset="0"/>
+              </a:rPr>
+              <a:t> </a:t>
+            </a:r>
+            <a:r>
+              <a:rPr lang="en-GB" dirty="0" err="1">
+                <a:solidFill>
+                  <a:schemeClr val="bg1"/>
+                </a:solidFill>
+                <a:latin typeface="Franklin Gothic Medium" panose="020B0603020102020204" pitchFamily="34" charset="0"/>
+              </a:rPr>
               <a:t>gedrag</a:t>
             </a:r>
             <a:r>
-              <a:rPr lang="en-GB" dirty="0"/>
-              <a:t> </a:t>
-            </a:r>
-            <a:r>
-              <a:rPr lang="en-GB" dirty="0" err="1"/>
+              <a:rPr lang="en-GB" dirty="0">
+                <a:solidFill>
+                  <a:schemeClr val="bg1"/>
+                </a:solidFill>
+                <a:latin typeface="Franklin Gothic Medium" panose="020B0603020102020204" pitchFamily="34" charset="0"/>
+              </a:rPr>
+              <a:t> </a:t>
+            </a:r>
+            <a:r>
+              <a:rPr lang="en-GB" dirty="0" err="1">
+                <a:solidFill>
+                  <a:schemeClr val="bg1"/>
+                </a:solidFill>
+                <a:latin typeface="Franklin Gothic Medium" panose="020B0603020102020204" pitchFamily="34" charset="0"/>
+              </a:rPr>
               <a:t>beinvloedt</a:t>
             </a:r>
             <a:r>
-              <a:rPr lang="en-GB" dirty="0"/>
+              <a:rPr lang="en-GB" dirty="0">
+                <a:solidFill>
+                  <a:schemeClr val="bg1"/>
+                </a:solidFill>
+                <a:latin typeface="Franklin Gothic Medium" panose="020B0603020102020204" pitchFamily="34" charset="0"/>
+              </a:rPr>
               <a:t> hoe de </a:t>
             </a:r>
             <a:r>
-              <a:rPr lang="en-GB" dirty="0" err="1"/>
+              <a:rPr lang="en-GB" dirty="0" err="1">
+                <a:solidFill>
+                  <a:schemeClr val="bg1"/>
+                </a:solidFill>
+                <a:latin typeface="Franklin Gothic Medium" panose="020B0603020102020204" pitchFamily="34" charset="0"/>
+              </a:rPr>
               <a:t>handschoenen</a:t>
             </a:r>
             <a:r>
-              <a:rPr lang="en-GB" dirty="0"/>
-              <a:t> </a:t>
-            </a:r>
-            <a:r>
-              <a:rPr lang="en-GB" dirty="0" err="1"/>
+              <a:rPr lang="en-GB" dirty="0">
+                <a:solidFill>
+                  <a:schemeClr val="bg1"/>
+                </a:solidFill>
+                <a:latin typeface="Franklin Gothic Medium" panose="020B0603020102020204" pitchFamily="34" charset="0"/>
+              </a:rPr>
+              <a:t> </a:t>
+            </a:r>
+            <a:r>
+              <a:rPr lang="en-GB" dirty="0" err="1">
+                <a:solidFill>
+                  <a:schemeClr val="bg1"/>
+                </a:solidFill>
+                <a:latin typeface="Franklin Gothic Medium" panose="020B0603020102020204" pitchFamily="34" charset="0"/>
+              </a:rPr>
               <a:t>geplaatst</a:t>
             </a:r>
             <a:r>
-              <a:rPr lang="en-GB" dirty="0"/>
-              <a:t> </a:t>
-            </a:r>
-            <a:r>
-              <a:rPr lang="en-GB" dirty="0" err="1"/>
+              <a:rPr lang="en-GB" dirty="0">
+                <a:solidFill>
+                  <a:schemeClr val="bg1"/>
+                </a:solidFill>
+                <a:latin typeface="Franklin Gothic Medium" panose="020B0603020102020204" pitchFamily="34" charset="0"/>
+              </a:rPr>
+              <a:t> </a:t>
+            </a:r>
+            <a:r>
+              <a:rPr lang="en-GB" dirty="0" err="1">
+                <a:solidFill>
+                  <a:schemeClr val="bg1"/>
+                </a:solidFill>
+                <a:latin typeface="Franklin Gothic Medium" panose="020B0603020102020204" pitchFamily="34" charset="0"/>
+              </a:rPr>
               <a:t>zijn</a:t>
             </a:r>
             <a:r>
-              <a:rPr lang="en-GB" dirty="0"/>
+              <a:rPr lang="en-GB" dirty="0">
+                <a:solidFill>
+                  <a:schemeClr val="bg1"/>
+                </a:solidFill>
+                <a:latin typeface="Franklin Gothic Medium" panose="020B0603020102020204" pitchFamily="34" charset="0"/>
+              </a:rPr>
               <a:t> door </a:t>
             </a:r>
             <a:r>
-              <a:rPr lang="en-GB" dirty="0" err="1"/>
+              <a:rPr lang="en-GB" dirty="0" err="1">
+                <a:solidFill>
+                  <a:schemeClr val="bg1"/>
+                </a:solidFill>
+                <a:latin typeface="Franklin Gothic Medium" panose="020B0603020102020204" pitchFamily="34" charset="0"/>
+              </a:rPr>
               <a:t>zichzelf</a:t>
             </a:r>
             <a:r>
-              <a:rPr lang="en-GB" dirty="0"/>
+              <a:rPr lang="en-GB" dirty="0">
+                <a:solidFill>
+                  <a:schemeClr val="bg1"/>
+                </a:solidFill>
+                <a:latin typeface="Franklin Gothic Medium" panose="020B0603020102020204" pitchFamily="34" charset="0"/>
+              </a:rPr>
               <a:t>, als </a:t>
             </a:r>
             <a:r>
-              <a:rPr lang="en-GB" dirty="0" err="1"/>
+              <a:rPr lang="en-GB" dirty="0" err="1">
+                <a:solidFill>
+                  <a:schemeClr val="bg1"/>
+                </a:solidFill>
+                <a:latin typeface="Franklin Gothic Medium" panose="020B0603020102020204" pitchFamily="34" charset="0"/>
+              </a:rPr>
               <a:t>hij</a:t>
             </a:r>
             <a:r>
-              <a:rPr lang="en-GB" dirty="0"/>
+              <a:rPr lang="en-GB" dirty="0">
+                <a:solidFill>
+                  <a:schemeClr val="bg1"/>
+                </a:solidFill>
+                <a:latin typeface="Franklin Gothic Medium" panose="020B0603020102020204" pitchFamily="34" charset="0"/>
+              </a:rPr>
               <a:t> boos is </a:t>
             </a:r>
             <a:r>
-              <a:rPr lang="en-GB" dirty="0" err="1"/>
+              <a:rPr lang="en-GB" dirty="0" err="1">
+                <a:solidFill>
+                  <a:schemeClr val="bg1"/>
+                </a:solidFill>
+                <a:latin typeface="Franklin Gothic Medium" panose="020B0603020102020204" pitchFamily="34" charset="0"/>
+              </a:rPr>
               <a:t>liggen</a:t>
             </a:r>
             <a:r>
-              <a:rPr lang="en-GB" dirty="0"/>
+              <a:rPr lang="en-GB" dirty="0">
+                <a:solidFill>
+                  <a:schemeClr val="bg1"/>
+                </a:solidFill>
+                <a:latin typeface="Franklin Gothic Medium" panose="020B0603020102020204" pitchFamily="34" charset="0"/>
+              </a:rPr>
               <a:t> ze er </a:t>
             </a:r>
             <a:r>
-              <a:rPr lang="en-GB" dirty="0" err="1"/>
+              <a:rPr lang="en-GB" dirty="0" err="1">
+                <a:solidFill>
+                  <a:schemeClr val="bg1"/>
+                </a:solidFill>
+                <a:latin typeface="Franklin Gothic Medium" panose="020B0603020102020204" pitchFamily="34" charset="0"/>
+              </a:rPr>
               <a:t>gesmeten</a:t>
             </a:r>
             <a:r>
-              <a:rPr lang="en-GB" dirty="0"/>
+              <a:rPr lang="en-GB" dirty="0">
+                <a:solidFill>
+                  <a:schemeClr val="bg1"/>
+                </a:solidFill>
+                <a:latin typeface="Franklin Gothic Medium" panose="020B0603020102020204" pitchFamily="34" charset="0"/>
+              </a:rPr>
               <a:t>, als </a:t>
             </a:r>
             <a:r>
-              <a:rPr lang="en-GB" dirty="0" err="1"/>
+              <a:rPr lang="en-GB" dirty="0" err="1">
+                <a:solidFill>
+                  <a:schemeClr val="bg1"/>
+                </a:solidFill>
+                <a:latin typeface="Franklin Gothic Medium" panose="020B0603020102020204" pitchFamily="34" charset="0"/>
+              </a:rPr>
               <a:t>hij</a:t>
             </a:r>
             <a:r>
-              <a:rPr lang="en-GB" dirty="0"/>
-              <a:t> </a:t>
-            </a:r>
-            <a:r>
-              <a:rPr lang="en-GB" dirty="0" err="1"/>
+              <a:rPr lang="en-GB" dirty="0">
+                <a:solidFill>
+                  <a:schemeClr val="bg1"/>
+                </a:solidFill>
+                <a:latin typeface="Franklin Gothic Medium" panose="020B0603020102020204" pitchFamily="34" charset="0"/>
+              </a:rPr>
+              <a:t> </a:t>
+            </a:r>
+            <a:r>
+              <a:rPr lang="en-GB" dirty="0" err="1">
+                <a:solidFill>
+                  <a:schemeClr val="bg1"/>
+                </a:solidFill>
+                <a:latin typeface="Franklin Gothic Medium" panose="020B0603020102020204" pitchFamily="34" charset="0"/>
+              </a:rPr>
               <a:t>kalm</a:t>
             </a:r>
             <a:r>
-              <a:rPr lang="en-GB" dirty="0"/>
+              <a:rPr lang="en-GB" dirty="0">
+                <a:solidFill>
+                  <a:schemeClr val="bg1"/>
+                </a:solidFill>
+                <a:latin typeface="Franklin Gothic Medium" panose="020B0603020102020204" pitchFamily="34" charset="0"/>
+              </a:rPr>
               <a:t> is </a:t>
             </a:r>
             <a:r>
-              <a:rPr lang="en-GB" dirty="0" err="1"/>
+              <a:rPr lang="en-GB" dirty="0" err="1">
+                <a:solidFill>
+                  <a:schemeClr val="bg1"/>
+                </a:solidFill>
+                <a:latin typeface="Franklin Gothic Medium" panose="020B0603020102020204" pitchFamily="34" charset="0"/>
+              </a:rPr>
               <a:t>zal</a:t>
             </a:r>
             <a:r>
-              <a:rPr lang="en-GB" dirty="0"/>
+              <a:rPr lang="en-GB" dirty="0">
+                <a:solidFill>
+                  <a:schemeClr val="bg1"/>
+                </a:solidFill>
+                <a:latin typeface="Franklin Gothic Medium" panose="020B0603020102020204" pitchFamily="34" charset="0"/>
+              </a:rPr>
               <a:t> er </a:t>
             </a:r>
             <a:r>
-              <a:rPr lang="en-GB" dirty="0" err="1"/>
+              <a:rPr lang="en-GB" dirty="0" err="1">
+                <a:solidFill>
+                  <a:schemeClr val="bg1"/>
+                </a:solidFill>
+                <a:latin typeface="Franklin Gothic Medium" panose="020B0603020102020204" pitchFamily="34" charset="0"/>
+              </a:rPr>
               <a:t>een</a:t>
             </a:r>
             <a:r>
-              <a:rPr lang="en-GB" dirty="0"/>
-              <a:t> </a:t>
-            </a:r>
-            <a:r>
-              <a:rPr lang="en-GB" dirty="0" err="1"/>
+              <a:rPr lang="en-GB" dirty="0">
+                <a:solidFill>
+                  <a:schemeClr val="bg1"/>
+                </a:solidFill>
+                <a:latin typeface="Franklin Gothic Medium" panose="020B0603020102020204" pitchFamily="34" charset="0"/>
+              </a:rPr>
+              <a:t> </a:t>
+            </a:r>
+            <a:r>
+              <a:rPr lang="en-GB" dirty="0" err="1">
+                <a:solidFill>
+                  <a:schemeClr val="bg1"/>
+                </a:solidFill>
+                <a:latin typeface="Franklin Gothic Medium" panose="020B0603020102020204" pitchFamily="34" charset="0"/>
+              </a:rPr>
               <a:t>vlagje</a:t>
             </a:r>
             <a:r>
-              <a:rPr lang="en-GB" dirty="0"/>
+              <a:rPr lang="en-GB" dirty="0">
+                <a:solidFill>
+                  <a:schemeClr val="bg1"/>
+                </a:solidFill>
+                <a:latin typeface="Franklin Gothic Medium" panose="020B0603020102020204" pitchFamily="34" charset="0"/>
+              </a:rPr>
               <a:t> van gemaakt </a:t>
             </a:r>
             <a:r>
-              <a:rPr lang="en-GB" dirty="0" err="1"/>
+              <a:rPr lang="en-GB" dirty="0" err="1">
+                <a:solidFill>
+                  <a:schemeClr val="bg1"/>
+                </a:solidFill>
+                <a:latin typeface="Franklin Gothic Medium" panose="020B0603020102020204" pitchFamily="34" charset="0"/>
+              </a:rPr>
               <a:t>zijn</a:t>
             </a:r>
             <a:r>
-              <a:rPr lang="en-GB" dirty="0"/>
+              <a:rPr lang="en-GB" dirty="0">
+                <a:solidFill>
+                  <a:schemeClr val="bg1"/>
+                </a:solidFill>
+                <a:latin typeface="Franklin Gothic Medium" panose="020B0603020102020204" pitchFamily="34" charset="0"/>
+              </a:rPr>
               <a:t>.</a:t>
             </a:r>
-            <a:endParaRPr lang="nl-BE" dirty="0"/>
+            <a:endParaRPr lang="nl-BE" dirty="0">
+              <a:solidFill>
+                <a:schemeClr val="bg1"/>
+              </a:solidFill>
+              <a:latin typeface="Franklin Gothic Medium" panose="020B0603020102020204" pitchFamily="34" charset="0"/>
+            </a:endParaRPr>
           </a:p>
         </p:txBody>
       </p:sp>
@@ -5426,7 +6890,7 @@
         </p:spPr>
         <p:txBody>
           <a:bodyPr>
-            <a:normAutofit fontScale="92500" lnSpcReduction="20000"/>
+            <a:normAutofit fontScale="92500" lnSpcReduction="10000"/>
           </a:bodyPr>
           <a:lstStyle/>
           <a:p>
@@ -5434,30 +6898,65 @@
               <a:buNone/>
             </a:pPr>
             <a:r>
-              <a:rPr lang="en-GB" dirty="0" err="1"/>
+              <a:rPr lang="en-GB" dirty="0" err="1">
+                <a:solidFill>
+                  <a:schemeClr val="bg1"/>
+                </a:solidFill>
+                <a:latin typeface="Franklin Gothic Medium" panose="020B0603020102020204" pitchFamily="34" charset="0"/>
+              </a:rPr>
               <a:t>Waar</a:t>
             </a:r>
             <a:r>
-              <a:rPr lang="en-GB" dirty="0"/>
-              <a:t> </a:t>
-            </a:r>
-            <a:r>
-              <a:rPr lang="en-GB" dirty="0" err="1"/>
+              <a:rPr lang="en-GB" dirty="0">
+                <a:solidFill>
+                  <a:schemeClr val="bg1"/>
+                </a:solidFill>
+                <a:latin typeface="Franklin Gothic Medium" panose="020B0603020102020204" pitchFamily="34" charset="0"/>
+              </a:rPr>
+              <a:t> </a:t>
+            </a:r>
+            <a:r>
+              <a:rPr lang="en-GB" dirty="0" err="1">
+                <a:solidFill>
+                  <a:schemeClr val="bg1"/>
+                </a:solidFill>
+                <a:latin typeface="Franklin Gothic Medium" panose="020B0603020102020204" pitchFamily="34" charset="0"/>
+              </a:rPr>
               <a:t>rond</a:t>
             </a:r>
             <a:r>
-              <a:rPr lang="en-GB" dirty="0"/>
-              <a:t> </a:t>
-            </a:r>
-            <a:r>
-              <a:rPr lang="en-GB" dirty="0" err="1"/>
+              <a:rPr lang="en-GB" dirty="0">
+                <a:solidFill>
+                  <a:schemeClr val="bg1"/>
+                </a:solidFill>
+                <a:latin typeface="Franklin Gothic Medium" panose="020B0603020102020204" pitchFamily="34" charset="0"/>
+              </a:rPr>
+              <a:t> </a:t>
+            </a:r>
+            <a:r>
+              <a:rPr lang="en-GB" dirty="0" err="1">
+                <a:solidFill>
+                  <a:schemeClr val="bg1"/>
+                </a:solidFill>
+                <a:latin typeface="Franklin Gothic Medium" panose="020B0603020102020204" pitchFamily="34" charset="0"/>
+              </a:rPr>
               <a:t>draait</a:t>
             </a:r>
             <a:r>
-              <a:rPr lang="en-GB" dirty="0"/>
+              <a:rPr lang="en-GB" dirty="0">
+                <a:solidFill>
+                  <a:schemeClr val="bg1"/>
+                </a:solidFill>
+                <a:latin typeface="Franklin Gothic Medium" panose="020B0603020102020204" pitchFamily="34" charset="0"/>
+              </a:rPr>
               <a:t> de video?</a:t>
             </a:r>
-            <a:endParaRPr lang="nl-BE" dirty="0"/>
+            <a:endParaRPr lang="nl-BE" dirty="0">
+              <a:solidFill>
+                <a:schemeClr val="bg1"/>
+              </a:solidFill>
+              <a:latin typeface="Franklin Gothic Medium" panose="020B0603020102020204" pitchFamily="34" charset="0"/>
+            </a:endParaRPr>
           </a:p>
         </p:txBody>
       </p:sp>
@@ -5477,6 +6976,14 @@
 <file path=ppt/slides/slide7.xml><?xml version="1.0" encoding="utf-8"?>
 <p:sld xmlns:a="http://schemas.openxmlformats.org/drawingml/2006/main" xmlns:r="http://schemas.openxmlformats.org/officeDocument/2006/relationships" xmlns:p="http://schemas.openxmlformats.org/presentationml/2006/main">
   <p:cSld>
+    <p:bg>
+      <p:bgPr>
+        <a:solidFill>
+          <a:schemeClr val="tx1"/>
+        </a:solidFill>
+        <a:effectLst/>
+      </p:bgPr>
+    </p:bg>
     <p:spTree>
       <p:nvGrpSpPr>
         <p:cNvPr id="1" name="">
@@ -5526,225 +7033,505 @@
           <a:lstStyle/>
           <a:p>
             <a:r>
-              <a:rPr lang="en-GB" b="1" dirty="0"/>
+              <a:rPr lang="en-GB" b="1" dirty="0">
+                <a:solidFill>
+                  <a:schemeClr val="bg1"/>
+                </a:solidFill>
+                <a:latin typeface="Franklin Gothic Medium" panose="020B0603020102020204" pitchFamily="34" charset="0"/>
+              </a:rPr>
               <a:t>Camera</a:t>
             </a:r>
             <a:br>
-              <a:rPr lang="en-GB" b="1" dirty="0"/>
+              <a:rPr lang="en-GB" b="1" dirty="0">
+                <a:solidFill>
+                  <a:schemeClr val="bg1"/>
+                </a:solidFill>
+                <a:latin typeface="Franklin Gothic Medium" panose="020B0603020102020204" pitchFamily="34" charset="0"/>
+              </a:rPr>
             </a:br>
             <a:r>
-              <a:rPr lang="en-GB" dirty="0"/>
+              <a:rPr lang="en-GB" dirty="0">
+                <a:solidFill>
+                  <a:schemeClr val="bg1"/>
+                </a:solidFill>
+                <a:latin typeface="Franklin Gothic Medium" panose="020B0603020102020204" pitchFamily="34" charset="0"/>
+              </a:rPr>
               <a:t>Het personage </a:t>
             </a:r>
             <a:r>
-              <a:rPr lang="en-GB" dirty="0" err="1"/>
+              <a:rPr lang="en-GB" dirty="0" err="1">
+                <a:solidFill>
+                  <a:schemeClr val="bg1"/>
+                </a:solidFill>
+                <a:latin typeface="Franklin Gothic Medium" panose="020B0603020102020204" pitchFamily="34" charset="0"/>
+              </a:rPr>
               <a:t>gaat</a:t>
             </a:r>
             <a:r>
-              <a:rPr lang="en-GB" dirty="0"/>
-              <a:t> </a:t>
-            </a:r>
-            <a:r>
-              <a:rPr lang="en-GB" dirty="0" err="1"/>
+              <a:rPr lang="en-GB" dirty="0">
+                <a:solidFill>
+                  <a:schemeClr val="bg1"/>
+                </a:solidFill>
+                <a:latin typeface="Franklin Gothic Medium" panose="020B0603020102020204" pitchFamily="34" charset="0"/>
+              </a:rPr>
+              <a:t> </a:t>
+            </a:r>
+            <a:r>
+              <a:rPr lang="en-GB" dirty="0" err="1">
+                <a:solidFill>
+                  <a:schemeClr val="bg1"/>
+                </a:solidFill>
+                <a:latin typeface="Franklin Gothic Medium" panose="020B0603020102020204" pitchFamily="34" charset="0"/>
+              </a:rPr>
               <a:t>fotograferen</a:t>
             </a:r>
             <a:r>
-              <a:rPr lang="en-GB" dirty="0"/>
+              <a:rPr lang="en-GB" dirty="0">
+                <a:solidFill>
+                  <a:schemeClr val="bg1"/>
+                </a:solidFill>
+                <a:latin typeface="Franklin Gothic Medium" panose="020B0603020102020204" pitchFamily="34" charset="0"/>
+              </a:rPr>
               <a:t> in het </a:t>
             </a:r>
             <a:r>
-              <a:rPr lang="en-GB" dirty="0" err="1"/>
+              <a:rPr lang="en-GB" dirty="0" err="1">
+                <a:solidFill>
+                  <a:schemeClr val="bg1"/>
+                </a:solidFill>
+                <a:latin typeface="Franklin Gothic Medium" panose="020B0603020102020204" pitchFamily="34" charset="0"/>
+              </a:rPr>
               <a:t>bos</a:t>
             </a:r>
             <a:r>
-              <a:rPr lang="en-GB" dirty="0"/>
+              <a:rPr lang="en-GB" dirty="0">
+                <a:solidFill>
+                  <a:schemeClr val="bg1"/>
+                </a:solidFill>
+                <a:latin typeface="Franklin Gothic Medium" panose="020B0603020102020204" pitchFamily="34" charset="0"/>
+              </a:rPr>
               <a:t>, maar </a:t>
             </a:r>
             <a:r>
-              <a:rPr lang="en-GB" dirty="0" err="1"/>
+              <a:rPr lang="en-GB" dirty="0" err="1">
+                <a:solidFill>
+                  <a:schemeClr val="bg1"/>
+                </a:solidFill>
+                <a:latin typeface="Franklin Gothic Medium" panose="020B0603020102020204" pitchFamily="34" charset="0"/>
+              </a:rPr>
               <a:t>hij</a:t>
             </a:r>
             <a:r>
-              <a:rPr lang="en-GB" dirty="0"/>
-              <a:t> </a:t>
-            </a:r>
-            <a:r>
-              <a:rPr lang="en-GB" dirty="0" err="1"/>
+              <a:rPr lang="en-GB" dirty="0">
+                <a:solidFill>
+                  <a:schemeClr val="bg1"/>
+                </a:solidFill>
+                <a:latin typeface="Franklin Gothic Medium" panose="020B0603020102020204" pitchFamily="34" charset="0"/>
+              </a:rPr>
+              <a:t> </a:t>
+            </a:r>
+            <a:r>
+              <a:rPr lang="en-GB" dirty="0" err="1">
+                <a:solidFill>
+                  <a:schemeClr val="bg1"/>
+                </a:solidFill>
+                <a:latin typeface="Franklin Gothic Medium" panose="020B0603020102020204" pitchFamily="34" charset="0"/>
+              </a:rPr>
               <a:t>gebruikt</a:t>
             </a:r>
             <a:r>
-              <a:rPr lang="en-GB" dirty="0"/>
+              <a:rPr lang="en-GB" dirty="0">
+                <a:solidFill>
+                  <a:schemeClr val="bg1"/>
+                </a:solidFill>
+                <a:latin typeface="Franklin Gothic Medium" panose="020B0603020102020204" pitchFamily="34" charset="0"/>
+              </a:rPr>
               <a:t> de camera al </a:t>
             </a:r>
             <a:r>
-              <a:rPr lang="en-GB" dirty="0" err="1"/>
+              <a:rPr lang="en-GB" dirty="0" err="1">
+                <a:solidFill>
+                  <a:schemeClr val="bg1"/>
+                </a:solidFill>
+                <a:latin typeface="Franklin Gothic Medium" panose="020B0603020102020204" pitchFamily="34" charset="0"/>
+              </a:rPr>
               <a:t>snel</a:t>
             </a:r>
             <a:r>
-              <a:rPr lang="en-GB" dirty="0"/>
+              <a:rPr lang="en-GB" dirty="0">
+                <a:solidFill>
+                  <a:schemeClr val="bg1"/>
+                </a:solidFill>
+                <a:latin typeface="Franklin Gothic Medium" panose="020B0603020102020204" pitchFamily="34" charset="0"/>
+              </a:rPr>
               <a:t> als </a:t>
             </a:r>
             <a:r>
-              <a:rPr lang="en-GB" dirty="0" err="1"/>
+              <a:rPr lang="en-GB" dirty="0" err="1">
+                <a:solidFill>
+                  <a:schemeClr val="bg1"/>
+                </a:solidFill>
+                <a:latin typeface="Franklin Gothic Medium" panose="020B0603020102020204" pitchFamily="34" charset="0"/>
+              </a:rPr>
               <a:t>middel</a:t>
             </a:r>
             <a:r>
-              <a:rPr lang="en-GB" dirty="0"/>
+              <a:rPr lang="en-GB" dirty="0">
+                <a:solidFill>
+                  <a:schemeClr val="bg1"/>
+                </a:solidFill>
+                <a:latin typeface="Franklin Gothic Medium" panose="020B0603020102020204" pitchFamily="34" charset="0"/>
+              </a:rPr>
               <a:t> om </a:t>
             </a:r>
             <a:r>
-              <a:rPr lang="en-GB" dirty="0" err="1"/>
+              <a:rPr lang="en-GB" dirty="0" err="1">
+                <a:solidFill>
+                  <a:schemeClr val="bg1"/>
+                </a:solidFill>
+                <a:latin typeface="Franklin Gothic Medium" panose="020B0603020102020204" pitchFamily="34" charset="0"/>
+              </a:rPr>
               <a:t>rond</a:t>
             </a:r>
             <a:r>
-              <a:rPr lang="en-GB" dirty="0"/>
-              <a:t> </a:t>
-            </a:r>
-            <a:r>
-              <a:rPr lang="en-GB" dirty="0" err="1"/>
+              <a:rPr lang="en-GB" dirty="0">
+                <a:solidFill>
+                  <a:schemeClr val="bg1"/>
+                </a:solidFill>
+                <a:latin typeface="Franklin Gothic Medium" panose="020B0603020102020204" pitchFamily="34" charset="0"/>
+              </a:rPr>
+              <a:t> </a:t>
+            </a:r>
+            <a:r>
+              <a:rPr lang="en-GB" dirty="0" err="1">
+                <a:solidFill>
+                  <a:schemeClr val="bg1"/>
+                </a:solidFill>
+                <a:latin typeface="Franklin Gothic Medium" panose="020B0603020102020204" pitchFamily="34" charset="0"/>
+              </a:rPr>
               <a:t>te</a:t>
             </a:r>
             <a:r>
-              <a:rPr lang="en-GB" dirty="0"/>
-              <a:t> </a:t>
-            </a:r>
-            <a:r>
-              <a:rPr lang="en-GB" dirty="0" err="1"/>
+              <a:rPr lang="en-GB" dirty="0">
+                <a:solidFill>
+                  <a:schemeClr val="bg1"/>
+                </a:solidFill>
+                <a:latin typeface="Franklin Gothic Medium" panose="020B0603020102020204" pitchFamily="34" charset="0"/>
+              </a:rPr>
+              <a:t> </a:t>
+            </a:r>
+            <a:r>
+              <a:rPr lang="en-GB" dirty="0" err="1">
+                <a:solidFill>
+                  <a:schemeClr val="bg1"/>
+                </a:solidFill>
+                <a:latin typeface="Franklin Gothic Medium" panose="020B0603020102020204" pitchFamily="34" charset="0"/>
+              </a:rPr>
               <a:t>kijken</a:t>
             </a:r>
             <a:r>
-              <a:rPr lang="en-GB" dirty="0"/>
+              <a:rPr lang="en-GB" dirty="0">
+                <a:solidFill>
+                  <a:schemeClr val="bg1"/>
+                </a:solidFill>
+                <a:latin typeface="Franklin Gothic Medium" panose="020B0603020102020204" pitchFamily="34" charset="0"/>
+              </a:rPr>
               <a:t> en </a:t>
             </a:r>
             <a:r>
-              <a:rPr lang="en-GB" dirty="0" err="1"/>
+              <a:rPr lang="en-GB" dirty="0" err="1">
+                <a:solidFill>
+                  <a:schemeClr val="bg1"/>
+                </a:solidFill>
+                <a:latin typeface="Franklin Gothic Medium" panose="020B0603020102020204" pitchFamily="34" charset="0"/>
+              </a:rPr>
               <a:t>ontdekt</a:t>
             </a:r>
             <a:r>
-              <a:rPr lang="en-GB" dirty="0"/>
-              <a:t> </a:t>
-            </a:r>
-            <a:r>
-              <a:rPr lang="en-GB" dirty="0" err="1"/>
+              <a:rPr lang="en-GB" dirty="0">
+                <a:solidFill>
+                  <a:schemeClr val="bg1"/>
+                </a:solidFill>
+                <a:latin typeface="Franklin Gothic Medium" panose="020B0603020102020204" pitchFamily="34" charset="0"/>
+              </a:rPr>
+              <a:t> </a:t>
+            </a:r>
+            <a:r>
+              <a:rPr lang="en-GB" dirty="0" err="1">
+                <a:solidFill>
+                  <a:schemeClr val="bg1"/>
+                </a:solidFill>
+                <a:latin typeface="Franklin Gothic Medium" panose="020B0603020102020204" pitchFamily="34" charset="0"/>
+              </a:rPr>
               <a:t>dat</a:t>
             </a:r>
             <a:r>
-              <a:rPr lang="en-GB" dirty="0"/>
+              <a:rPr lang="en-GB" dirty="0">
+                <a:solidFill>
+                  <a:schemeClr val="bg1"/>
+                </a:solidFill>
+                <a:latin typeface="Franklin Gothic Medium" panose="020B0603020102020204" pitchFamily="34" charset="0"/>
+              </a:rPr>
               <a:t> de </a:t>
             </a:r>
             <a:r>
-              <a:rPr lang="en-GB" dirty="0" err="1"/>
+              <a:rPr lang="en-GB" dirty="0" err="1">
+                <a:solidFill>
+                  <a:schemeClr val="bg1"/>
+                </a:solidFill>
+                <a:latin typeface="Franklin Gothic Medium" panose="020B0603020102020204" pitchFamily="34" charset="0"/>
+              </a:rPr>
               <a:t>foto’s</a:t>
             </a:r>
             <a:r>
-              <a:rPr lang="en-GB" dirty="0"/>
+              <a:rPr lang="en-GB" dirty="0">
+                <a:solidFill>
+                  <a:schemeClr val="bg1"/>
+                </a:solidFill>
+                <a:latin typeface="Franklin Gothic Medium" panose="020B0603020102020204" pitchFamily="34" charset="0"/>
+              </a:rPr>
               <a:t> die op de camera </a:t>
             </a:r>
             <a:r>
-              <a:rPr lang="en-GB" dirty="0" err="1"/>
+              <a:rPr lang="en-GB" dirty="0" err="1">
+                <a:solidFill>
+                  <a:schemeClr val="bg1"/>
+                </a:solidFill>
+                <a:latin typeface="Franklin Gothic Medium" panose="020B0603020102020204" pitchFamily="34" charset="0"/>
+              </a:rPr>
               <a:t>staan</a:t>
             </a:r>
             <a:r>
-              <a:rPr lang="en-GB" dirty="0"/>
-              <a:t> </a:t>
-            </a:r>
-            <a:r>
-              <a:rPr lang="en-GB" dirty="0" err="1"/>
+              <a:rPr lang="en-GB" dirty="0">
+                <a:solidFill>
+                  <a:schemeClr val="bg1"/>
+                </a:solidFill>
+                <a:latin typeface="Franklin Gothic Medium" panose="020B0603020102020204" pitchFamily="34" charset="0"/>
+              </a:rPr>
+              <a:t> </a:t>
+            </a:r>
+            <a:r>
+              <a:rPr lang="en-GB" dirty="0" err="1">
+                <a:solidFill>
+                  <a:schemeClr val="bg1"/>
+                </a:solidFill>
+                <a:latin typeface="Franklin Gothic Medium" panose="020B0603020102020204" pitchFamily="34" charset="0"/>
+              </a:rPr>
               <a:t>ook</a:t>
             </a:r>
             <a:r>
-              <a:rPr lang="en-GB" dirty="0"/>
-              <a:t> </a:t>
-            </a:r>
-            <a:r>
-              <a:rPr lang="en-GB" dirty="0" err="1"/>
+              <a:rPr lang="en-GB" dirty="0">
+                <a:solidFill>
+                  <a:schemeClr val="bg1"/>
+                </a:solidFill>
+                <a:latin typeface="Franklin Gothic Medium" panose="020B0603020102020204" pitchFamily="34" charset="0"/>
+              </a:rPr>
+              <a:t> </a:t>
+            </a:r>
+            <a:r>
+              <a:rPr lang="en-GB" dirty="0" err="1">
+                <a:solidFill>
+                  <a:schemeClr val="bg1"/>
+                </a:solidFill>
+                <a:latin typeface="Franklin Gothic Medium" panose="020B0603020102020204" pitchFamily="34" charset="0"/>
+              </a:rPr>
               <a:t>veranderen</a:t>
             </a:r>
             <a:r>
-              <a:rPr lang="en-GB" dirty="0"/>
-              <a:t> </a:t>
-            </a:r>
-            <a:r>
-              <a:rPr lang="en-GB" dirty="0" err="1"/>
+              <a:rPr lang="en-GB" dirty="0">
+                <a:solidFill>
+                  <a:schemeClr val="bg1"/>
+                </a:solidFill>
+                <a:latin typeface="Franklin Gothic Medium" panose="020B0603020102020204" pitchFamily="34" charset="0"/>
+              </a:rPr>
+              <a:t> </a:t>
+            </a:r>
+            <a:r>
+              <a:rPr lang="en-GB" dirty="0" err="1">
+                <a:solidFill>
+                  <a:schemeClr val="bg1"/>
+                </a:solidFill>
+                <a:latin typeface="Franklin Gothic Medium" panose="020B0603020102020204" pitchFamily="34" charset="0"/>
+              </a:rPr>
               <a:t>doorheen</a:t>
             </a:r>
             <a:r>
-              <a:rPr lang="en-GB" dirty="0"/>
+              <a:rPr lang="en-GB" dirty="0">
+                <a:solidFill>
+                  <a:schemeClr val="bg1"/>
+                </a:solidFill>
+                <a:latin typeface="Franklin Gothic Medium" panose="020B0603020102020204" pitchFamily="34" charset="0"/>
+              </a:rPr>
               <a:t> de loop. </a:t>
             </a:r>
             <a:r>
-              <a:rPr lang="en-GB" dirty="0" err="1"/>
+              <a:rPr lang="en-GB" dirty="0" err="1">
+                <a:solidFill>
+                  <a:schemeClr val="bg1"/>
+                </a:solidFill>
+                <a:latin typeface="Franklin Gothic Medium" panose="020B0603020102020204" pitchFamily="34" charset="0"/>
+              </a:rPr>
               <a:t>Dit</a:t>
             </a:r>
             <a:r>
-              <a:rPr lang="en-GB" dirty="0"/>
-              <a:t> </a:t>
-            </a:r>
-            <a:r>
-              <a:rPr lang="en-GB" dirty="0" err="1"/>
+              <a:rPr lang="en-GB" dirty="0">
+                <a:solidFill>
+                  <a:schemeClr val="bg1"/>
+                </a:solidFill>
+                <a:latin typeface="Franklin Gothic Medium" panose="020B0603020102020204" pitchFamily="34" charset="0"/>
+              </a:rPr>
+              <a:t> </a:t>
+            </a:r>
+            <a:r>
+              <a:rPr lang="en-GB" dirty="0" err="1">
+                <a:solidFill>
+                  <a:schemeClr val="bg1"/>
+                </a:solidFill>
+                <a:latin typeface="Franklin Gothic Medium" panose="020B0603020102020204" pitchFamily="34" charset="0"/>
+              </a:rPr>
               <a:t>forceert</a:t>
             </a:r>
             <a:r>
-              <a:rPr lang="en-GB" dirty="0"/>
+              <a:rPr lang="en-GB" dirty="0">
+                <a:solidFill>
+                  <a:schemeClr val="bg1"/>
+                </a:solidFill>
+                <a:latin typeface="Franklin Gothic Medium" panose="020B0603020102020204" pitchFamily="34" charset="0"/>
+              </a:rPr>
               <a:t> hem om de </a:t>
             </a:r>
             <a:r>
-              <a:rPr lang="en-GB" dirty="0" err="1"/>
+              <a:rPr lang="en-GB" dirty="0" err="1">
+                <a:solidFill>
+                  <a:schemeClr val="bg1"/>
+                </a:solidFill>
+                <a:latin typeface="Franklin Gothic Medium" panose="020B0603020102020204" pitchFamily="34" charset="0"/>
+              </a:rPr>
               <a:t>richting</a:t>
             </a:r>
             <a:r>
-              <a:rPr lang="en-GB" dirty="0"/>
+              <a:rPr lang="en-GB" dirty="0">
+                <a:solidFill>
+                  <a:schemeClr val="bg1"/>
+                </a:solidFill>
+                <a:latin typeface="Franklin Gothic Medium" panose="020B0603020102020204" pitchFamily="34" charset="0"/>
+              </a:rPr>
               <a:t> van de loop en </a:t>
             </a:r>
             <a:r>
-              <a:rPr lang="en-GB" dirty="0" err="1"/>
+              <a:rPr lang="en-GB" dirty="0" err="1">
+                <a:solidFill>
+                  <a:schemeClr val="bg1"/>
+                </a:solidFill>
+                <a:latin typeface="Franklin Gothic Medium" panose="020B0603020102020204" pitchFamily="34" charset="0"/>
+              </a:rPr>
               <a:t>zijn</a:t>
             </a:r>
             <a:r>
-              <a:rPr lang="en-GB" dirty="0"/>
-              <a:t> </a:t>
-            </a:r>
-            <a:r>
-              <a:rPr lang="en-GB" dirty="0" err="1"/>
+              <a:rPr lang="en-GB" dirty="0">
+                <a:solidFill>
+                  <a:schemeClr val="bg1"/>
+                </a:solidFill>
+                <a:latin typeface="Franklin Gothic Medium" panose="020B0603020102020204" pitchFamily="34" charset="0"/>
+              </a:rPr>
+              <a:t> </a:t>
+            </a:r>
+            <a:r>
+              <a:rPr lang="en-GB" dirty="0" err="1">
+                <a:solidFill>
+                  <a:schemeClr val="bg1"/>
+                </a:solidFill>
+                <a:latin typeface="Franklin Gothic Medium" panose="020B0603020102020204" pitchFamily="34" charset="0"/>
+              </a:rPr>
               <a:t>leven</a:t>
             </a:r>
             <a:r>
-              <a:rPr lang="en-GB" dirty="0"/>
-              <a:t> </a:t>
-            </a:r>
-            <a:r>
-              <a:rPr lang="en-GB" dirty="0" err="1"/>
+              <a:rPr lang="en-GB" dirty="0">
+                <a:solidFill>
+                  <a:schemeClr val="bg1"/>
+                </a:solidFill>
+                <a:latin typeface="Franklin Gothic Medium" panose="020B0603020102020204" pitchFamily="34" charset="0"/>
+              </a:rPr>
+              <a:t> </a:t>
+            </a:r>
+            <a:r>
+              <a:rPr lang="en-GB" dirty="0" err="1">
+                <a:solidFill>
+                  <a:schemeClr val="bg1"/>
+                </a:solidFill>
+                <a:latin typeface="Franklin Gothic Medium" panose="020B0603020102020204" pitchFamily="34" charset="0"/>
+              </a:rPr>
               <a:t>onder</a:t>
             </a:r>
             <a:r>
-              <a:rPr lang="en-GB" dirty="0"/>
-              <a:t> </a:t>
-            </a:r>
-            <a:r>
-              <a:rPr lang="en-GB" dirty="0" err="1"/>
+              <a:rPr lang="en-GB" dirty="0">
+                <a:solidFill>
+                  <a:schemeClr val="bg1"/>
+                </a:solidFill>
+                <a:latin typeface="Franklin Gothic Medium" panose="020B0603020102020204" pitchFamily="34" charset="0"/>
+              </a:rPr>
+              <a:t> </a:t>
+            </a:r>
+            <a:r>
+              <a:rPr lang="en-GB" dirty="0" err="1">
+                <a:solidFill>
+                  <a:schemeClr val="bg1"/>
+                </a:solidFill>
+                <a:latin typeface="Franklin Gothic Medium" panose="020B0603020102020204" pitchFamily="34" charset="0"/>
+              </a:rPr>
               <a:t>ogen</a:t>
             </a:r>
             <a:r>
-              <a:rPr lang="en-GB" dirty="0"/>
-              <a:t> </a:t>
-            </a:r>
-            <a:r>
-              <a:rPr lang="en-GB" dirty="0" err="1"/>
+              <a:rPr lang="en-GB" dirty="0">
+                <a:solidFill>
+                  <a:schemeClr val="bg1"/>
+                </a:solidFill>
+                <a:latin typeface="Franklin Gothic Medium" panose="020B0603020102020204" pitchFamily="34" charset="0"/>
+              </a:rPr>
+              <a:t> </a:t>
+            </a:r>
+            <a:r>
+              <a:rPr lang="en-GB" dirty="0" err="1">
+                <a:solidFill>
+                  <a:schemeClr val="bg1"/>
+                </a:solidFill>
+                <a:latin typeface="Franklin Gothic Medium" panose="020B0603020102020204" pitchFamily="34" charset="0"/>
+              </a:rPr>
               <a:t>te</a:t>
             </a:r>
             <a:r>
-              <a:rPr lang="en-GB" dirty="0"/>
-              <a:t> </a:t>
-            </a:r>
-            <a:r>
-              <a:rPr lang="en-GB" dirty="0" err="1"/>
+              <a:rPr lang="en-GB" dirty="0">
+                <a:solidFill>
+                  <a:schemeClr val="bg1"/>
+                </a:solidFill>
+                <a:latin typeface="Franklin Gothic Medium" panose="020B0603020102020204" pitchFamily="34" charset="0"/>
+              </a:rPr>
+              <a:t> </a:t>
+            </a:r>
+            <a:r>
+              <a:rPr lang="en-GB" dirty="0" err="1">
+                <a:solidFill>
+                  <a:schemeClr val="bg1"/>
+                </a:solidFill>
+                <a:latin typeface="Franklin Gothic Medium" panose="020B0603020102020204" pitchFamily="34" charset="0"/>
+              </a:rPr>
               <a:t>zien</a:t>
             </a:r>
             <a:r>
-              <a:rPr lang="en-GB" dirty="0"/>
+              <a:rPr lang="en-GB" dirty="0">
+                <a:solidFill>
+                  <a:schemeClr val="bg1"/>
+                </a:solidFill>
+                <a:latin typeface="Franklin Gothic Medium" panose="020B0603020102020204" pitchFamily="34" charset="0"/>
+              </a:rPr>
               <a:t>.</a:t>
             </a:r>
-            <a:endParaRPr lang="nl-BE" dirty="0"/>
+            <a:endParaRPr lang="nl-BE" dirty="0">
+              <a:solidFill>
+                <a:schemeClr val="bg1"/>
+              </a:solidFill>
+              <a:latin typeface="Franklin Gothic Medium" panose="020B0603020102020204" pitchFamily="34" charset="0"/>
+            </a:endParaRPr>
           </a:p>
         </p:txBody>
       </p:sp>
@@ -5772,7 +7559,7 @@
         </p:spPr>
         <p:txBody>
           <a:bodyPr>
-            <a:normAutofit fontScale="92500" lnSpcReduction="20000"/>
+            <a:normAutofit fontScale="92500" lnSpcReduction="10000"/>
           </a:bodyPr>
           <a:lstStyle/>
           <a:p>
@@ -5780,30 +7567,65 @@
               <a:buNone/>
             </a:pPr>
             <a:r>
-              <a:rPr lang="en-GB" dirty="0" err="1"/>
+              <a:rPr lang="en-GB" dirty="0" err="1">
+                <a:solidFill>
+                  <a:schemeClr val="bg1"/>
+                </a:solidFill>
+                <a:latin typeface="Franklin Gothic Medium" panose="020B0603020102020204" pitchFamily="34" charset="0"/>
+              </a:rPr>
               <a:t>Waar</a:t>
             </a:r>
             <a:r>
-              <a:rPr lang="en-GB" dirty="0"/>
-              <a:t> </a:t>
-            </a:r>
-            <a:r>
-              <a:rPr lang="en-GB" dirty="0" err="1"/>
+              <a:rPr lang="en-GB" dirty="0">
+                <a:solidFill>
+                  <a:schemeClr val="bg1"/>
+                </a:solidFill>
+                <a:latin typeface="Franklin Gothic Medium" panose="020B0603020102020204" pitchFamily="34" charset="0"/>
+              </a:rPr>
+              <a:t> </a:t>
+            </a:r>
+            <a:r>
+              <a:rPr lang="en-GB" dirty="0" err="1">
+                <a:solidFill>
+                  <a:schemeClr val="bg1"/>
+                </a:solidFill>
+                <a:latin typeface="Franklin Gothic Medium" panose="020B0603020102020204" pitchFamily="34" charset="0"/>
+              </a:rPr>
               <a:t>rond</a:t>
             </a:r>
             <a:r>
-              <a:rPr lang="en-GB" dirty="0"/>
-              <a:t> </a:t>
-            </a:r>
-            <a:r>
-              <a:rPr lang="en-GB" dirty="0" err="1"/>
+              <a:rPr lang="en-GB" dirty="0">
+                <a:solidFill>
+                  <a:schemeClr val="bg1"/>
+                </a:solidFill>
+                <a:latin typeface="Franklin Gothic Medium" panose="020B0603020102020204" pitchFamily="34" charset="0"/>
+              </a:rPr>
+              <a:t> </a:t>
+            </a:r>
+            <a:r>
+              <a:rPr lang="en-GB" dirty="0" err="1">
+                <a:solidFill>
+                  <a:schemeClr val="bg1"/>
+                </a:solidFill>
+                <a:latin typeface="Franklin Gothic Medium" panose="020B0603020102020204" pitchFamily="34" charset="0"/>
+              </a:rPr>
               <a:t>draait</a:t>
             </a:r>
             <a:r>
-              <a:rPr lang="en-GB" dirty="0"/>
+              <a:rPr lang="en-GB" dirty="0">
+                <a:solidFill>
+                  <a:schemeClr val="bg1"/>
+                </a:solidFill>
+                <a:latin typeface="Franklin Gothic Medium" panose="020B0603020102020204" pitchFamily="34" charset="0"/>
+              </a:rPr>
               <a:t> de video?</a:t>
             </a:r>
-            <a:endParaRPr lang="nl-BE" dirty="0"/>
+            <a:endParaRPr lang="nl-BE" dirty="0">
+              <a:solidFill>
+                <a:schemeClr val="bg1"/>
+              </a:solidFill>
+              <a:latin typeface="Franklin Gothic Medium" panose="020B0603020102020204" pitchFamily="34" charset="0"/>
+            </a:endParaRPr>
           </a:p>
         </p:txBody>
       </p:sp>
@@ -5823,6 +7645,14 @@
 <file path=ppt/slides/slide8.xml><?xml version="1.0" encoding="utf-8"?>
 <p:sld xmlns:a="http://schemas.openxmlformats.org/drawingml/2006/main" xmlns:r="http://schemas.openxmlformats.org/officeDocument/2006/relationships" xmlns:p="http://schemas.openxmlformats.org/presentationml/2006/main">
   <p:cSld>
+    <p:bg>
+      <p:bgPr>
+        <a:solidFill>
+          <a:schemeClr val="tx1"/>
+        </a:solidFill>
+        <a:effectLst/>
+      </p:bgPr>
+    </p:bg>
     <p:spTree>
       <p:nvGrpSpPr>
         <p:cNvPr id="1" name="">
@@ -5872,89 +7702,199 @@
           <a:lstStyle/>
           <a:p>
             <a:r>
-              <a:rPr lang="en-GB" b="1" dirty="0"/>
+              <a:rPr lang="en-GB" b="1" dirty="0">
+                <a:solidFill>
+                  <a:schemeClr val="bg1"/>
+                </a:solidFill>
+                <a:latin typeface="Franklin Gothic Medium" panose="020B0603020102020204" pitchFamily="34" charset="0"/>
+              </a:rPr>
               <a:t>Begin</a:t>
             </a:r>
             <a:br>
-              <a:rPr lang="en-GB" b="1" dirty="0"/>
+              <a:rPr lang="en-GB" b="1" dirty="0">
+                <a:solidFill>
+                  <a:schemeClr val="bg1"/>
+                </a:solidFill>
+                <a:latin typeface="Franklin Gothic Medium" panose="020B0603020102020204" pitchFamily="34" charset="0"/>
+              </a:rPr>
             </a:br>
             <a:r>
-              <a:rPr lang="en-GB" dirty="0"/>
+              <a:rPr lang="en-GB" dirty="0">
+                <a:solidFill>
+                  <a:schemeClr val="bg1"/>
+                </a:solidFill>
+                <a:latin typeface="Franklin Gothic Medium" panose="020B0603020102020204" pitchFamily="34" charset="0"/>
+              </a:rPr>
               <a:t>Het personage is </a:t>
             </a:r>
             <a:r>
-              <a:rPr lang="en-GB" dirty="0" err="1"/>
+              <a:rPr lang="en-GB" dirty="0" err="1">
+                <a:solidFill>
+                  <a:schemeClr val="bg1"/>
+                </a:solidFill>
+                <a:latin typeface="Franklin Gothic Medium" panose="020B0603020102020204" pitchFamily="34" charset="0"/>
+              </a:rPr>
               <a:t>verloren</a:t>
             </a:r>
             <a:r>
-              <a:rPr lang="en-GB" dirty="0"/>
+              <a:rPr lang="en-GB" dirty="0">
+                <a:solidFill>
+                  <a:schemeClr val="bg1"/>
+                </a:solidFill>
+                <a:latin typeface="Franklin Gothic Medium" panose="020B0603020102020204" pitchFamily="34" charset="0"/>
+              </a:rPr>
               <a:t> in </a:t>
             </a:r>
             <a:r>
-              <a:rPr lang="en-GB" dirty="0" err="1"/>
+              <a:rPr lang="en-GB" dirty="0" err="1">
+                <a:solidFill>
+                  <a:schemeClr val="bg1"/>
+                </a:solidFill>
+                <a:latin typeface="Franklin Gothic Medium" panose="020B0603020102020204" pitchFamily="34" charset="0"/>
+              </a:rPr>
               <a:t>zijn</a:t>
             </a:r>
             <a:r>
-              <a:rPr lang="en-GB" dirty="0"/>
-              <a:t> </a:t>
-            </a:r>
-            <a:r>
-              <a:rPr lang="en-GB" dirty="0" err="1"/>
+              <a:rPr lang="en-GB" dirty="0">
+                <a:solidFill>
+                  <a:schemeClr val="bg1"/>
+                </a:solidFill>
+                <a:latin typeface="Franklin Gothic Medium" panose="020B0603020102020204" pitchFamily="34" charset="0"/>
+              </a:rPr>
+              <a:t> </a:t>
+            </a:r>
+            <a:r>
+              <a:rPr lang="en-GB" dirty="0" err="1">
+                <a:solidFill>
+                  <a:schemeClr val="bg1"/>
+                </a:solidFill>
+                <a:latin typeface="Franklin Gothic Medium" panose="020B0603020102020204" pitchFamily="34" charset="0"/>
+              </a:rPr>
               <a:t>gedachten</a:t>
             </a:r>
             <a:r>
-              <a:rPr lang="en-GB" dirty="0"/>
-              <a:t> </a:t>
-            </a:r>
-            <a:r>
-              <a:rPr lang="en-GB" dirty="0" err="1"/>
+              <a:rPr lang="en-GB" dirty="0">
+                <a:solidFill>
+                  <a:schemeClr val="bg1"/>
+                </a:solidFill>
+                <a:latin typeface="Franklin Gothic Medium" panose="020B0603020102020204" pitchFamily="34" charset="0"/>
+              </a:rPr>
+              <a:t> </a:t>
+            </a:r>
+            <a:r>
+              <a:rPr lang="en-GB" dirty="0" err="1">
+                <a:solidFill>
+                  <a:schemeClr val="bg1"/>
+                </a:solidFill>
+                <a:latin typeface="Franklin Gothic Medium" panose="020B0603020102020204" pitchFamily="34" charset="0"/>
+              </a:rPr>
               <a:t>mentaal</a:t>
             </a:r>
             <a:r>
-              <a:rPr lang="en-GB" dirty="0"/>
+              <a:rPr lang="en-GB" dirty="0">
+                <a:solidFill>
+                  <a:schemeClr val="bg1"/>
+                </a:solidFill>
+                <a:latin typeface="Franklin Gothic Medium" panose="020B0603020102020204" pitchFamily="34" charset="0"/>
+              </a:rPr>
               <a:t>, maar </a:t>
             </a:r>
             <a:r>
-              <a:rPr lang="en-GB" dirty="0" err="1"/>
+              <a:rPr lang="en-GB" dirty="0" err="1">
+                <a:solidFill>
+                  <a:schemeClr val="bg1"/>
+                </a:solidFill>
+                <a:latin typeface="Franklin Gothic Medium" panose="020B0603020102020204" pitchFamily="34" charset="0"/>
+              </a:rPr>
               <a:t>zoekt</a:t>
             </a:r>
             <a:r>
-              <a:rPr lang="en-GB" dirty="0"/>
-              <a:t> </a:t>
-            </a:r>
-            <a:r>
-              <a:rPr lang="en-GB" dirty="0" err="1"/>
+              <a:rPr lang="en-GB" dirty="0">
+                <a:solidFill>
+                  <a:schemeClr val="bg1"/>
+                </a:solidFill>
+                <a:latin typeface="Franklin Gothic Medium" panose="020B0603020102020204" pitchFamily="34" charset="0"/>
+              </a:rPr>
+              <a:t> </a:t>
+            </a:r>
+            <a:r>
+              <a:rPr lang="en-GB" dirty="0" err="1">
+                <a:solidFill>
+                  <a:schemeClr val="bg1"/>
+                </a:solidFill>
+                <a:latin typeface="Franklin Gothic Medium" panose="020B0603020102020204" pitchFamily="34" charset="0"/>
+              </a:rPr>
               <a:t>een</a:t>
             </a:r>
             <a:r>
-              <a:rPr lang="en-GB" dirty="0"/>
-              <a:t> </a:t>
-            </a:r>
-            <a:r>
-              <a:rPr lang="en-GB" dirty="0" err="1"/>
+              <a:rPr lang="en-GB" dirty="0">
+                <a:solidFill>
+                  <a:schemeClr val="bg1"/>
+                </a:solidFill>
+                <a:latin typeface="Franklin Gothic Medium" panose="020B0603020102020204" pitchFamily="34" charset="0"/>
+              </a:rPr>
+              <a:t> </a:t>
+            </a:r>
+            <a:r>
+              <a:rPr lang="en-GB" dirty="0" err="1">
+                <a:solidFill>
+                  <a:schemeClr val="bg1"/>
+                </a:solidFill>
+                <a:latin typeface="Franklin Gothic Medium" panose="020B0603020102020204" pitchFamily="34" charset="0"/>
+              </a:rPr>
               <a:t>fysieke</a:t>
             </a:r>
             <a:r>
-              <a:rPr lang="en-GB" dirty="0"/>
-              <a:t> </a:t>
-            </a:r>
-            <a:r>
-              <a:rPr lang="en-GB" dirty="0" err="1"/>
+              <a:rPr lang="en-GB" dirty="0">
+                <a:solidFill>
+                  <a:schemeClr val="bg1"/>
+                </a:solidFill>
+                <a:latin typeface="Franklin Gothic Medium" panose="020B0603020102020204" pitchFamily="34" charset="0"/>
+              </a:rPr>
+              <a:t> </a:t>
+            </a:r>
+            <a:r>
+              <a:rPr lang="en-GB" dirty="0" err="1">
+                <a:solidFill>
+                  <a:schemeClr val="bg1"/>
+                </a:solidFill>
+                <a:latin typeface="Franklin Gothic Medium" panose="020B0603020102020204" pitchFamily="34" charset="0"/>
+              </a:rPr>
               <a:t>verlossing</a:t>
             </a:r>
             <a:r>
-              <a:rPr lang="en-GB" dirty="0"/>
+              <a:rPr lang="en-GB" dirty="0">
+                <a:solidFill>
+                  <a:schemeClr val="bg1"/>
+                </a:solidFill>
+                <a:latin typeface="Franklin Gothic Medium" panose="020B0603020102020204" pitchFamily="34" charset="0"/>
+              </a:rPr>
               <a:t> in het </a:t>
             </a:r>
             <a:r>
-              <a:rPr lang="en-GB" dirty="0" err="1"/>
+              <a:rPr lang="en-GB" dirty="0" err="1">
+                <a:solidFill>
+                  <a:schemeClr val="bg1"/>
+                </a:solidFill>
+                <a:latin typeface="Franklin Gothic Medium" panose="020B0603020102020204" pitchFamily="34" charset="0"/>
+              </a:rPr>
               <a:t>bos</a:t>
             </a:r>
             <a:r>
-              <a:rPr lang="en-GB" dirty="0"/>
+              <a:rPr lang="en-GB" dirty="0">
+                <a:solidFill>
+                  <a:schemeClr val="bg1"/>
+                </a:solidFill>
+                <a:latin typeface="Franklin Gothic Medium" panose="020B0603020102020204" pitchFamily="34" charset="0"/>
+              </a:rPr>
               <a:t>.</a:t>
             </a:r>
-            <a:endParaRPr lang="nl-BE" dirty="0"/>
+            <a:endParaRPr lang="nl-BE" dirty="0">
+              <a:solidFill>
+                <a:schemeClr val="bg1"/>
+              </a:solidFill>
+              <a:latin typeface="Franklin Gothic Medium" panose="020B0603020102020204" pitchFamily="34" charset="0"/>
+            </a:endParaRPr>
           </a:p>
         </p:txBody>
       </p:sp>
@@ -5982,7 +7922,7 @@
         </p:spPr>
         <p:txBody>
           <a:bodyPr>
-            <a:normAutofit fontScale="92500" lnSpcReduction="20000"/>
+            <a:normAutofit fontScale="92500" lnSpcReduction="10000"/>
           </a:bodyPr>
           <a:lstStyle/>
           <a:p>
@@ -5990,18 +7930,38 @@
               <a:buNone/>
             </a:pPr>
             <a:r>
-              <a:rPr lang="en-GB" dirty="0" err="1"/>
+              <a:rPr lang="en-GB" dirty="0" err="1">
+                <a:solidFill>
+                  <a:schemeClr val="bg1"/>
+                </a:solidFill>
+                <a:latin typeface="Franklin Gothic Medium" panose="020B0603020102020204" pitchFamily="34" charset="0"/>
+              </a:rPr>
               <a:t>Verloop</a:t>
             </a:r>
             <a:r>
-              <a:rPr lang="en-GB" dirty="0"/>
+              <a:rPr lang="en-GB" dirty="0">
+                <a:solidFill>
+                  <a:schemeClr val="bg1"/>
+                </a:solidFill>
+                <a:latin typeface="Franklin Gothic Medium" panose="020B0603020102020204" pitchFamily="34" charset="0"/>
+              </a:rPr>
               <a:t> van het </a:t>
             </a:r>
             <a:r>
-              <a:rPr lang="en-GB" dirty="0" err="1"/>
+              <a:rPr lang="en-GB" dirty="0" err="1">
+                <a:solidFill>
+                  <a:schemeClr val="bg1"/>
+                </a:solidFill>
+                <a:latin typeface="Franklin Gothic Medium" panose="020B0603020102020204" pitchFamily="34" charset="0"/>
+              </a:rPr>
               <a:t>verhaal</a:t>
             </a:r>
-            <a:endParaRPr lang="nl-BE" dirty="0"/>
+            <a:endParaRPr lang="nl-BE" dirty="0">
+              <a:solidFill>
+                <a:schemeClr val="bg1"/>
+              </a:solidFill>
+              <a:latin typeface="Franklin Gothic Medium" panose="020B0603020102020204" pitchFamily="34" charset="0"/>
+            </a:endParaRPr>
           </a:p>
         </p:txBody>
       </p:sp>
@@ -6021,6 +7981,14 @@
 <file path=ppt/slides/slide9.xml><?xml version="1.0" encoding="utf-8"?>
 <p:sld xmlns:a="http://schemas.openxmlformats.org/drawingml/2006/main" xmlns:r="http://schemas.openxmlformats.org/officeDocument/2006/relationships" xmlns:p="http://schemas.openxmlformats.org/presentationml/2006/main">
   <p:cSld>
+    <p:bg>
+      <p:bgPr>
+        <a:solidFill>
+          <a:schemeClr val="tx1"/>
+        </a:solidFill>
+        <a:effectLst/>
+      </p:bgPr>
+    </p:bg>
     <p:spTree>
       <p:nvGrpSpPr>
         <p:cNvPr id="1" name="">
@@ -6070,14 +8038,29 @@
           <a:lstStyle/>
           <a:p>
             <a:r>
-              <a:rPr lang="en-GB" b="1" dirty="0"/>
+              <a:rPr lang="en-GB" b="1" dirty="0">
+                <a:solidFill>
+                  <a:schemeClr val="bg1"/>
+                </a:solidFill>
+                <a:latin typeface="Franklin Gothic Medium" panose="020B0603020102020204" pitchFamily="34" charset="0"/>
+              </a:rPr>
               <a:t>Midden</a:t>
             </a:r>
             <a:br>
-              <a:rPr lang="en-GB" b="1" dirty="0"/>
+              <a:rPr lang="en-GB" b="1" dirty="0">
+                <a:solidFill>
+                  <a:schemeClr val="bg1"/>
+                </a:solidFill>
+                <a:latin typeface="Franklin Gothic Medium" panose="020B0603020102020204" pitchFamily="34" charset="0"/>
+              </a:rPr>
             </a:br>
             <a:r>
-              <a:rPr lang="nl-BE" dirty="0"/>
+              <a:rPr lang="nl-BE" dirty="0">
+                <a:solidFill>
+                  <a:schemeClr val="bg1"/>
+                </a:solidFill>
+                <a:latin typeface="Franklin Gothic Medium" panose="020B0603020102020204" pitchFamily="34" charset="0"/>
+              </a:rPr>
               <a:t>Hij komt vreemde, onverklaarbare dingen tegen, waaronder mysterieuze foto’s en video’s op de camera. En in de verte andere versies van zichzelf. Hij kan het niet begrijpen, maar het voelt steeds meer alsof het bos hem naar deze confrontatie met zichzelf duwt.</a:t>
             </a:r>
           </a:p>
@@ -6107,7 +8090,7 @@
         </p:spPr>
         <p:txBody>
           <a:bodyPr>
-            <a:normAutofit fontScale="92500" lnSpcReduction="20000"/>
+            <a:normAutofit fontScale="92500" lnSpcReduction="10000"/>
           </a:bodyPr>
           <a:lstStyle/>
           <a:p>
@@ -6115,18 +8098,38 @@
               <a:buNone/>
             </a:pPr>
             <a:r>
-              <a:rPr lang="en-GB" dirty="0" err="1"/>
+              <a:rPr lang="en-GB" dirty="0" err="1">
+                <a:solidFill>
+                  <a:schemeClr val="bg1"/>
+                </a:solidFill>
+                <a:latin typeface="Franklin Gothic Medium" panose="020B0603020102020204" pitchFamily="34" charset="0"/>
+              </a:rPr>
               <a:t>Verloop</a:t>
             </a:r>
             <a:r>
-              <a:rPr lang="en-GB" dirty="0"/>
+              <a:rPr lang="en-GB" dirty="0">
+                <a:solidFill>
+                  <a:schemeClr val="bg1"/>
+                </a:solidFill>
+                <a:latin typeface="Franklin Gothic Medium" panose="020B0603020102020204" pitchFamily="34" charset="0"/>
+              </a:rPr>
               <a:t> van het </a:t>
             </a:r>
             <a:r>
-              <a:rPr lang="en-GB" dirty="0" err="1"/>
+              <a:rPr lang="en-GB" dirty="0" err="1">
+                <a:solidFill>
+                  <a:schemeClr val="bg1"/>
+                </a:solidFill>
+                <a:latin typeface="Franklin Gothic Medium" panose="020B0603020102020204" pitchFamily="34" charset="0"/>
+              </a:rPr>
               <a:t>verhaal</a:t>
             </a:r>
-            <a:endParaRPr lang="nl-BE" dirty="0"/>
+            <a:endParaRPr lang="nl-BE" dirty="0">
+              <a:solidFill>
+                <a:schemeClr val="bg1"/>
+              </a:solidFill>
+              <a:latin typeface="Franklin Gothic Medium" panose="020B0603020102020204" pitchFamily="34" charset="0"/>
+            </a:endParaRPr>
           </a:p>
         </p:txBody>
       </p:sp>
